--- a/docs/marketing/KampusteyimAPP_Universite_Topluluklari_Sunumu.pptx
+++ b/docs/marketing/KampusteyimAPP_Universite_Topluluklari_Sunumu.pptx
@@ -13,6 +13,8 @@
     <p:sldId id="261" r:id="rId12"/>
     <p:sldId id="262" r:id="rId13"/>
     <p:sldId id="263" r:id="rId14"/>
+    <p:sldId id="264" r:id="rId15"/>
+    <p:sldId id="265" r:id="rId16"/>
   </p:sldIdLst>
   <p:sldSz cx="12191695" cy="6858000" type="screen4x3"/>
   <p:notesSz cx="6858000" cy="9144000"/>
@@ -3428,7 +3430,7 @@
                 </a:solidFill>
                 <a:latin typeface="Calibri"/>
               </a:rPr>
-              <a:t>Topluluk tanıtım standı · Takip · Üyelik · Etkinlik</a:t>
+              <a:t>Rozet · Hikâye · Reels · Etkinlik · Elçilik</a:t>
             </a:r>
           </a:p>
         </p:txBody>
@@ -3464,6 +3466,537 @@
                 <a:latin typeface="Calibri"/>
               </a:rPr>
               <a:t>@kampusteyimapp  ·  kampusteyim.app</a:t>
+            </a:r>
+          </a:p>
+        </p:txBody>
+      </p:sp>
+    </p:spTree>
+  </p:cSld>
+  <p:clrMapOvr>
+    <a:masterClrMapping/>
+  </p:clrMapOvr>
+</p:sld>
+</file>
+
+<file path=ppt/slides/slide10.xml><?xml version="1.0" encoding="utf-8"?>
+<p:sld xmlns:a="http://schemas.openxmlformats.org/drawingml/2006/main" xmlns:p="http://schemas.openxmlformats.org/presentationml/2006/main" xmlns:r="http://schemas.openxmlformats.org/officeDocument/2006/relationships">
+  <p:cSld>
+    <p:spTree>
+      <p:nvGrpSpPr>
+        <p:cNvPr id="1" name=""/>
+        <p:cNvGrpSpPr/>
+        <p:nvPr/>
+      </p:nvGrpSpPr>
+      <p:grpSpPr/>
+      <p:sp>
+        <p:nvSpPr>
+          <p:cNvPr id="2" name="Rectangle 1"/>
+          <p:cNvSpPr/>
+          <p:nvPr/>
+        </p:nvSpPr>
+        <p:spPr>
+          <a:xfrm>
+            <a:off x="0" y="0"/>
+            <a:ext cx="12191695" cy="502920"/>
+          </a:xfrm>
+          <a:prstGeom prst="rect">
+            <a:avLst/>
+          </a:prstGeom>
+          <a:solidFill>
+            <a:srgbClr val="0B1F33"/>
+          </a:solidFill>
+          <a:ln>
+            <a:noFill/>
+          </a:ln>
+        </p:spPr>
+        <p:style>
+          <a:lnRef idx="1">
+            <a:schemeClr val="accent1"/>
+          </a:lnRef>
+          <a:fillRef idx="3">
+            <a:schemeClr val="accent1"/>
+          </a:fillRef>
+          <a:effectRef idx="2">
+            <a:schemeClr val="accent1"/>
+          </a:effectRef>
+          <a:fontRef idx="minor">
+            <a:schemeClr val="lt1"/>
+          </a:fontRef>
+        </p:style>
+        <p:txBody>
+          <a:bodyPr rtlCol="0" anchor="ctr"/>
+          <a:lstStyle/>
+          <a:p>
+            <a:pPr algn="ctr"/>
+          </a:p>
+        </p:txBody>
+      </p:sp>
+      <p:pic>
+        <p:nvPicPr>
+          <p:cNvPr id="3" name="Picture 2" descr="logo_kampus_header.png"/>
+          <p:cNvPicPr>
+            <a:picLocks noChangeAspect="1"/>
+          </p:cNvPicPr>
+          <p:nvPr/>
+        </p:nvPicPr>
+        <p:blipFill>
+          <a:blip r:embed="rId2"/>
+          <a:stretch>
+            <a:fillRect/>
+          </a:stretch>
+        </p:blipFill>
+        <p:spPr>
+          <a:xfrm>
+            <a:off x="320040" y="91440"/>
+            <a:ext cx="320040" cy="320040"/>
+          </a:xfrm>
+          <a:prstGeom prst="rect">
+            <a:avLst/>
+          </a:prstGeom>
+        </p:spPr>
+      </p:pic>
+      <p:sp>
+        <p:nvSpPr>
+          <p:cNvPr id="4" name="TextBox 3"/>
+          <p:cNvSpPr txBox="1"/>
+          <p:nvPr/>
+        </p:nvSpPr>
+        <p:spPr>
+          <a:xfrm>
+            <a:off x="731520" y="109728"/>
+            <a:ext cx="3657600" cy="320040"/>
+          </a:xfrm>
+          <a:prstGeom prst="rect">
+            <a:avLst/>
+          </a:prstGeom>
+          <a:noFill/>
+        </p:spPr>
+        <p:txBody>
+          <a:bodyPr wrap="square">
+            <a:spAutoFit/>
+          </a:bodyPr>
+          <a:lstStyle/>
+          <a:p>
+            <a:pPr algn="l"/>
+            <a:r>
+              <a:rPr sz="1400" b="1">
+                <a:solidFill>
+                  <a:srgbClr val="FFFFFF"/>
+                </a:solidFill>
+                <a:latin typeface="Calibri"/>
+              </a:rPr>
+              <a:t>KampüsteyimAPP</a:t>
+            </a:r>
+          </a:p>
+        </p:txBody>
+      </p:sp>
+      <p:sp>
+        <p:nvSpPr>
+          <p:cNvPr id="5" name="TextBox 4"/>
+          <p:cNvSpPr txBox="1"/>
+          <p:nvPr/>
+        </p:nvSpPr>
+        <p:spPr>
+          <a:xfrm>
+            <a:off x="9265615" y="128016"/>
+            <a:ext cx="2560320" cy="274320"/>
+          </a:xfrm>
+          <a:prstGeom prst="rect">
+            <a:avLst/>
+          </a:prstGeom>
+          <a:noFill/>
+        </p:spPr>
+        <p:txBody>
+          <a:bodyPr wrap="square">
+            <a:spAutoFit/>
+          </a:bodyPr>
+          <a:lstStyle/>
+          <a:p>
+            <a:pPr algn="r"/>
+            <a:r>
+              <a:rPr sz="1100" b="0">
+                <a:solidFill>
+                  <a:srgbClr val="B8C8D4"/>
+                </a:solidFill>
+                <a:latin typeface="Calibri"/>
+              </a:rPr>
+              <a:t>Üniversite Toplulukları</a:t>
+            </a:r>
+          </a:p>
+        </p:txBody>
+      </p:sp>
+      <p:sp>
+        <p:nvSpPr>
+          <p:cNvPr id="6" name="TextBox 5"/>
+          <p:cNvSpPr txBox="1"/>
+          <p:nvPr/>
+        </p:nvSpPr>
+        <p:spPr>
+          <a:xfrm>
+            <a:off x="502920" y="658368"/>
+            <a:ext cx="3657600" cy="256032"/>
+          </a:xfrm>
+          <a:prstGeom prst="rect">
+            <a:avLst/>
+          </a:prstGeom>
+          <a:noFill/>
+        </p:spPr>
+        <p:txBody>
+          <a:bodyPr wrap="square">
+            <a:spAutoFit/>
+          </a:bodyPr>
+          <a:lstStyle/>
+          <a:p>
+            <a:pPr algn="l"/>
+            <a:r>
+              <a:rPr sz="1100" b="1">
+                <a:solidFill>
+                  <a:srgbClr val="1FA6A0"/>
+                </a:solidFill>
+                <a:latin typeface="Calibri"/>
+              </a:rPr>
+              <a:t>KAPANIŞ</a:t>
+            </a:r>
+          </a:p>
+        </p:txBody>
+      </p:sp>
+      <p:sp>
+        <p:nvSpPr>
+          <p:cNvPr id="7" name="TextBox 6"/>
+          <p:cNvSpPr txBox="1"/>
+          <p:nvPr/>
+        </p:nvSpPr>
+        <p:spPr>
+          <a:xfrm>
+            <a:off x="502920" y="896112"/>
+            <a:ext cx="10515600" cy="411480"/>
+          </a:xfrm>
+          <a:prstGeom prst="rect">
+            <a:avLst/>
+          </a:prstGeom>
+          <a:noFill/>
+        </p:spPr>
+        <p:txBody>
+          <a:bodyPr wrap="square">
+            <a:spAutoFit/>
+          </a:bodyPr>
+          <a:lstStyle/>
+          <a:p>
+            <a:pPr algn="l"/>
+            <a:r>
+              <a:rPr sz="2800" b="1">
+                <a:solidFill>
+                  <a:srgbClr val="0B1F33"/>
+                </a:solidFill>
+                <a:latin typeface="Calibri"/>
+              </a:rPr>
+              <a:t>Topluluğunuz kampüsün dijital akışında</a:t>
+            </a:r>
+          </a:p>
+        </p:txBody>
+      </p:sp>
+      <p:sp>
+        <p:nvSpPr>
+          <p:cNvPr id="8" name="Rounded Rectangle 7"/>
+          <p:cNvSpPr/>
+          <p:nvPr/>
+        </p:nvSpPr>
+        <p:spPr>
+          <a:xfrm>
+            <a:off x="502920" y="1325880"/>
+            <a:ext cx="1005840" cy="64008"/>
+          </a:xfrm>
+          <a:prstGeom prst="roundRect">
+            <a:avLst/>
+          </a:prstGeom>
+          <a:solidFill>
+            <a:srgbClr val="1FA6A0"/>
+          </a:solidFill>
+          <a:ln>
+            <a:noFill/>
+          </a:ln>
+        </p:spPr>
+        <p:style>
+          <a:lnRef idx="1">
+            <a:schemeClr val="accent1"/>
+          </a:lnRef>
+          <a:fillRef idx="3">
+            <a:schemeClr val="accent1"/>
+          </a:fillRef>
+          <a:effectRef idx="2">
+            <a:schemeClr val="accent1"/>
+          </a:effectRef>
+          <a:fontRef idx="minor">
+            <a:schemeClr val="lt1"/>
+          </a:fontRef>
+        </p:style>
+        <p:txBody>
+          <a:bodyPr rtlCol="0" anchor="ctr"/>
+          <a:lstStyle/>
+          <a:p>
+            <a:pPr algn="ctr"/>
+          </a:p>
+        </p:txBody>
+      </p:sp>
+      <p:sp>
+        <p:nvSpPr>
+          <p:cNvPr id="9" name="Rounded Rectangle 8"/>
+          <p:cNvSpPr/>
+          <p:nvPr/>
+        </p:nvSpPr>
+        <p:spPr>
+          <a:xfrm>
+            <a:off x="822960" y="1737360"/>
+            <a:ext cx="10561320" cy="2148840"/>
+          </a:xfrm>
+          <a:prstGeom prst="roundRect">
+            <a:avLst>
+              <a:gd name="adj" fmla="val 12000"/>
+            </a:avLst>
+          </a:prstGeom>
+          <a:solidFill>
+            <a:srgbClr val="0B1F33"/>
+          </a:solidFill>
+          <a:ln>
+            <a:noFill/>
+          </a:ln>
+        </p:spPr>
+        <p:style>
+          <a:lnRef idx="1">
+            <a:schemeClr val="accent1"/>
+          </a:lnRef>
+          <a:fillRef idx="3">
+            <a:schemeClr val="accent1"/>
+          </a:fillRef>
+          <a:effectRef idx="2">
+            <a:schemeClr val="accent1"/>
+          </a:effectRef>
+          <a:fontRef idx="minor">
+            <a:schemeClr val="lt1"/>
+          </a:fontRef>
+        </p:style>
+        <p:txBody>
+          <a:bodyPr rtlCol="0" anchor="ctr"/>
+          <a:lstStyle/>
+          <a:p>
+            <a:pPr algn="ctr"/>
+          </a:p>
+        </p:txBody>
+      </p:sp>
+      <p:sp>
+        <p:nvSpPr>
+          <p:cNvPr id="10" name="TextBox 9"/>
+          <p:cNvSpPr txBox="1"/>
+          <p:nvPr/>
+        </p:nvSpPr>
+        <p:spPr>
+          <a:xfrm>
+            <a:off x="1188720" y="2103120"/>
+            <a:ext cx="9829800" cy="502920"/>
+          </a:xfrm>
+          <a:prstGeom prst="rect">
+            <a:avLst/>
+          </a:prstGeom>
+          <a:noFill/>
+        </p:spPr>
+        <p:txBody>
+          <a:bodyPr wrap="square">
+            <a:spAutoFit/>
+          </a:bodyPr>
+          <a:lstStyle/>
+          <a:p>
+            <a:pPr algn="ctr"/>
+            <a:r>
+              <a:rPr sz="2400" b="1">
+                <a:solidFill>
+                  <a:srgbClr val="2EC4B6"/>
+                </a:solidFill>
+                <a:latin typeface="Calibri"/>
+              </a:rPr>
+              <a:t>Etkinliğini duyur. Üyeni büyüt. Resmi kimliğini güçlendir.</a:t>
+            </a:r>
+          </a:p>
+        </p:txBody>
+      </p:sp>
+      <p:sp>
+        <p:nvSpPr>
+          <p:cNvPr id="11" name="TextBox 10"/>
+          <p:cNvSpPr txBox="1"/>
+          <p:nvPr/>
+        </p:nvSpPr>
+        <p:spPr>
+          <a:xfrm>
+            <a:off x="1554480" y="2816352"/>
+            <a:ext cx="9098280" cy="594360"/>
+          </a:xfrm>
+          <a:prstGeom prst="rect">
+            <a:avLst/>
+          </a:prstGeom>
+          <a:noFill/>
+        </p:spPr>
+        <p:txBody>
+          <a:bodyPr wrap="square">
+            <a:spAutoFit/>
+          </a:bodyPr>
+          <a:lstStyle/>
+          <a:p>
+            <a:pPr algn="ctr"/>
+            <a:r>
+              <a:rPr sz="1600" b="0">
+                <a:solidFill>
+                  <a:srgbClr val="FFFFFF"/>
+                </a:solidFill>
+                <a:latin typeface="Calibri"/>
+              </a:rPr>
+              <a:t>KampüsteyimAPP ile topluluğunuzu doğrulanmış, erişilebilir ve ölçülebilir bir dijital merkeze taşıyın.</a:t>
+            </a:r>
+          </a:p>
+        </p:txBody>
+      </p:sp>
+      <p:sp>
+        <p:nvSpPr>
+          <p:cNvPr id="12" name="TextBox 11"/>
+          <p:cNvSpPr txBox="1"/>
+          <p:nvPr/>
+        </p:nvSpPr>
+        <p:spPr>
+          <a:xfrm>
+            <a:off x="914400" y="4572000"/>
+            <a:ext cx="10332720" cy="502920"/>
+          </a:xfrm>
+          <a:prstGeom prst="rect">
+            <a:avLst/>
+          </a:prstGeom>
+          <a:noFill/>
+        </p:spPr>
+        <p:txBody>
+          <a:bodyPr wrap="square">
+            <a:spAutoFit/>
+          </a:bodyPr>
+          <a:lstStyle/>
+          <a:p>
+            <a:pPr algn="ctr"/>
+            <a:r>
+              <a:rPr sz="1700" b="1">
+                <a:solidFill>
+                  <a:srgbClr val="1FA6A0"/>
+                </a:solidFill>
+                <a:latin typeface="Calibri"/>
+              </a:rPr>
+              <a:t>@kampusteyimapp  ·  kampusteyim.app  ·  app.kampusteyim.app</a:t>
+            </a:r>
+          </a:p>
+        </p:txBody>
+      </p:sp>
+      <p:sp>
+        <p:nvSpPr>
+          <p:cNvPr id="13" name="Rectangle 12"/>
+          <p:cNvSpPr/>
+          <p:nvPr/>
+        </p:nvSpPr>
+        <p:spPr>
+          <a:xfrm>
+            <a:off x="0" y="6473952"/>
+            <a:ext cx="12191695" cy="384048"/>
+          </a:xfrm>
+          <a:prstGeom prst="rect">
+            <a:avLst/>
+          </a:prstGeom>
+          <a:solidFill>
+            <a:srgbClr val="1FA6A0"/>
+          </a:solidFill>
+          <a:ln>
+            <a:noFill/>
+          </a:ln>
+        </p:spPr>
+        <p:style>
+          <a:lnRef idx="1">
+            <a:schemeClr val="accent1"/>
+          </a:lnRef>
+          <a:fillRef idx="3">
+            <a:schemeClr val="accent1"/>
+          </a:fillRef>
+          <a:effectRef idx="2">
+            <a:schemeClr val="accent1"/>
+          </a:effectRef>
+          <a:fontRef idx="minor">
+            <a:schemeClr val="lt1"/>
+          </a:fontRef>
+        </p:style>
+        <p:txBody>
+          <a:bodyPr rtlCol="0" anchor="ctr"/>
+          <a:lstStyle/>
+          <a:p>
+            <a:pPr algn="ctr"/>
+          </a:p>
+        </p:txBody>
+      </p:sp>
+      <p:sp>
+        <p:nvSpPr>
+          <p:cNvPr id="14" name="TextBox 13"/>
+          <p:cNvSpPr txBox="1"/>
+          <p:nvPr/>
+        </p:nvSpPr>
+        <p:spPr>
+          <a:xfrm>
+            <a:off x="365760" y="6547104"/>
+            <a:ext cx="3657600" cy="256032"/>
+          </a:xfrm>
+          <a:prstGeom prst="rect">
+            <a:avLst/>
+          </a:prstGeom>
+          <a:noFill/>
+        </p:spPr>
+        <p:txBody>
+          <a:bodyPr wrap="square">
+            <a:spAutoFit/>
+          </a:bodyPr>
+          <a:lstStyle/>
+          <a:p>
+            <a:pPr algn="l"/>
+            <a:r>
+              <a:rPr sz="1100" b="1">
+                <a:solidFill>
+                  <a:srgbClr val="FFFFFF"/>
+                </a:solidFill>
+                <a:latin typeface="Calibri"/>
+              </a:rPr>
+              <a:t>@kampusteyimapp</a:t>
+            </a:r>
+          </a:p>
+        </p:txBody>
+      </p:sp>
+      <p:sp>
+        <p:nvSpPr>
+          <p:cNvPr id="15" name="TextBox 14"/>
+          <p:cNvSpPr txBox="1"/>
+          <p:nvPr/>
+        </p:nvSpPr>
+        <p:spPr>
+          <a:xfrm>
+            <a:off x="10180015" y="6547104"/>
+            <a:ext cx="1645920" cy="256032"/>
+          </a:xfrm>
+          <a:prstGeom prst="rect">
+            <a:avLst/>
+          </a:prstGeom>
+          <a:noFill/>
+        </p:spPr>
+        <p:txBody>
+          <a:bodyPr wrap="square">
+            <a:spAutoFit/>
+          </a:bodyPr>
+          <a:lstStyle/>
+          <a:p>
+            <a:pPr algn="r"/>
+            <a:r>
+              <a:rPr sz="1100" b="0">
+                <a:solidFill>
+                  <a:srgbClr val="FFFFFF"/>
+                </a:solidFill>
+                <a:latin typeface="Calibri"/>
+              </a:rPr>
+              <a:t>9 / 9</a:t>
             </a:r>
           </a:p>
         </p:txBody>
@@ -3846,7 +4379,7 @@
                 </a:solidFill>
                 <a:latin typeface="Calibri"/>
               </a:rPr>
-              <a:t>Doğrulama rozetiyle sahte hesaplardan net biçimde ayrışın.</a:t>
+              <a:t>Altın / mavi rozetle sahte hesaplardan net biçimde ayrışın.</a:t>
             </a:r>
           </a:p>
         </p:txBody>
@@ -4191,7 +4724,7 @@
                 </a:solidFill>
                 <a:latin typeface="Calibri"/>
               </a:rPr>
-              <a:t>Akış, hikâye ve Reels ile topluluk nabzını canlı tutun.</a:t>
+              <a:t>Akış, hikâye halkası ve Reels ile nabzı canlı tutun.</a:t>
             </a:r>
           </a:p>
         </p:txBody>
@@ -4304,7 +4837,7 @@
                 </a:solidFill>
                 <a:latin typeface="Calibri"/>
               </a:rPr>
-              <a:t>1 / 7</a:t>
+              <a:t>1 / 9</a:t>
             </a:r>
           </a:p>
         </p:txBody>
@@ -5677,7 +6210,7 @@
                 </a:solidFill>
                 <a:latin typeface="Calibri"/>
               </a:rPr>
-              <a:t>2 / 7</a:t>
+              <a:t>2 / 9</a:t>
             </a:r>
           </a:p>
         </p:txBody>
@@ -5959,7 +6492,7 @@
         <p:spPr>
           <a:xfrm>
             <a:off x="502920" y="1508760"/>
-            <a:ext cx="6400800" cy="548640"/>
+            <a:ext cx="6400800" cy="502920"/>
           </a:xfrm>
           <a:prstGeom prst="rect">
             <a:avLst/>
@@ -5993,7 +6526,7 @@
         </p:nvSpPr>
         <p:spPr>
           <a:xfrm>
-            <a:off x="502920" y="2240280"/>
+            <a:off x="502920" y="2148840"/>
             <a:ext cx="6400800" cy="3200400"/>
           </a:xfrm>
           <a:prstGeom prst="rect">
@@ -6013,13 +6546,13 @@
               </a:spcAft>
             </a:pPr>
             <a:r>
-              <a:rPr sz="1400" b="0">
+              <a:rPr sz="1300" b="0">
                 <a:solidFill>
                   <a:srgbClr val="1A2B3A"/>
                 </a:solidFill>
                 <a:latin typeface="Calibri"/>
               </a:rPr>
-              <a:t>•  Akış: ana duyuru ve kayıt bağlantısı</a:t>
+              <a:t>•  Akış: ana duyuru — şehir / üniversite filtresiyle doğru kitle</a:t>
             </a:r>
           </a:p>
           <a:p>
@@ -6029,13 +6562,13 @@
               </a:spcAft>
             </a:pPr>
             <a:r>
-              <a:rPr sz="1400" b="0">
+              <a:rPr sz="1300" b="0">
                 <a:solidFill>
                   <a:srgbClr val="1A2B3A"/>
                 </a:solidFill>
                 <a:latin typeface="Calibri"/>
               </a:rPr>
-              <a:t>•  Hikâye: geri sayım, hatırlatma ve anlık paylaşım</a:t>
+              <a:t>•  Hikâye halkası: geri sayım, hatırlatma, anlık paylaşım (stream)</a:t>
             </a:r>
           </a:p>
           <a:p>
@@ -6045,13 +6578,13 @@
               </a:spcAft>
             </a:pPr>
             <a:r>
-              <a:rPr sz="1400" b="0">
+              <a:rPr sz="1300" b="0">
                 <a:solidFill>
                   <a:srgbClr val="1A2B3A"/>
                 </a:solidFill>
                 <a:latin typeface="Calibri"/>
               </a:rPr>
-              <a:t>•  Reels: stand, ekip ve etkinlik özeti</a:t>
+              <a:t>•  Reels: stand, ekip ve etkinlik özeti — kaydırınca anında oynar</a:t>
             </a:r>
           </a:p>
           <a:p>
@@ -6061,13 +6594,29 @@
               </a:spcAft>
             </a:pPr>
             <a:r>
-              <a:rPr sz="1400" b="0">
+              <a:rPr sz="1300" b="0">
                 <a:solidFill>
                   <a:srgbClr val="1A2B3A"/>
                 </a:solidFill>
                 <a:latin typeface="Calibri"/>
               </a:rPr>
-              <a:t>•  Profil: topluluk kimliği, rozet ve geçmiş içerikler</a:t>
+              <a:t>•  Profil: logo, rozet, biyografi ve geçmiş içerikler</a:t>
+            </a:r>
+          </a:p>
+          <a:p>
+            <a:pPr>
+              <a:spcAft>
+                <a:spcPts val="800"/>
+              </a:spcAft>
+            </a:pPr>
+            <a:r>
+              <a:rPr sz="1300" b="0">
+                <a:solidFill>
+                  <a:srgbClr val="1A2B3A"/>
+                </a:solidFill>
+                <a:latin typeface="Calibri"/>
+              </a:rPr>
+              <a:t>•  Push: takipçiye anlık duyuru ve etkinlik hatırlatması</a:t>
             </a:r>
           </a:p>
         </p:txBody>
@@ -6204,7 +6753,7 @@
                 </a:solidFill>
                 <a:latin typeface="Calibri"/>
               </a:rPr>
-              <a:t>3 / 7</a:t>
+              <a:t>3 / 9</a:t>
             </a:r>
           </a:p>
         </p:txBody>
@@ -6394,7 +6943,7 @@
                 </a:solidFill>
                 <a:latin typeface="Calibri"/>
               </a:rPr>
-              <a:t>ETKİNLİK</a:t>
+              <a:t>HİKÂYE &amp; REELS</a:t>
             </a:r>
           </a:p>
         </p:txBody>
@@ -6429,7 +6978,7 @@
                 </a:solidFill>
                 <a:latin typeface="Calibri"/>
               </a:rPr>
-              <a:t>Başvuru, kontenjan ve hatırlatma tek yerde</a:t>
+              <a:t>Instagram ritminde kampüs medyası</a:t>
             </a:r>
           </a:p>
         </p:txBody>
@@ -6485,8 +7034,8 @@
         </p:nvSpPr>
         <p:spPr>
           <a:xfrm>
-            <a:off x="502920" y="1828800"/>
-            <a:ext cx="1522476" cy="1051560"/>
+            <a:off x="640080" y="1691640"/>
+            <a:ext cx="5367528" cy="1984248"/>
           </a:xfrm>
           <a:prstGeom prst="roundRect">
             <a:avLst>
@@ -6494,7 +7043,7 @@
             </a:avLst>
           </a:prstGeom>
           <a:solidFill>
-            <a:srgbClr val="EEF5F8"/>
+            <a:srgbClr val="0B1F33"/>
           </a:solidFill>
           <a:ln>
             <a:noFill/>
@@ -6524,16 +7073,431 @@
       </p:sp>
       <p:sp>
         <p:nvSpPr>
-          <p:cNvPr id="10" name="Oval 9"/>
+          <p:cNvPr id="10" name="TextBox 9"/>
+          <p:cNvSpPr txBox="1"/>
+          <p:nvPr/>
+        </p:nvSpPr>
+        <p:spPr>
+          <a:xfrm>
+            <a:off x="841248" y="1874520"/>
+            <a:ext cx="5001768" cy="320040"/>
+          </a:xfrm>
+          <a:prstGeom prst="rect">
+            <a:avLst/>
+          </a:prstGeom>
+          <a:noFill/>
+        </p:spPr>
+        <p:txBody>
+          <a:bodyPr wrap="square">
+            <a:spAutoFit/>
+          </a:bodyPr>
+          <a:lstStyle/>
+          <a:p>
+            <a:pPr algn="l"/>
+            <a:r>
+              <a:rPr sz="1500" b="1">
+                <a:solidFill>
+                  <a:srgbClr val="2EC4B6"/>
+                </a:solidFill>
+                <a:latin typeface="Calibri"/>
+              </a:rPr>
+              <a:t>Hikâye halkası</a:t>
+            </a:r>
+          </a:p>
+        </p:txBody>
+      </p:sp>
+      <p:sp>
+        <p:nvSpPr>
+          <p:cNvPr id="11" name="TextBox 10"/>
+          <p:cNvSpPr txBox="1"/>
+          <p:nvPr/>
+        </p:nvSpPr>
+        <p:spPr>
+          <a:xfrm>
+            <a:off x="841248" y="2194560"/>
+            <a:ext cx="5001768" cy="1344168"/>
+          </a:xfrm>
+          <a:prstGeom prst="rect">
+            <a:avLst/>
+          </a:prstGeom>
+          <a:noFill/>
+        </p:spPr>
+        <p:txBody>
+          <a:bodyPr wrap="square">
+            <a:spAutoFit/>
+          </a:bodyPr>
+          <a:lstStyle/>
+          <a:p>
+            <a:pPr algn="l"/>
+            <a:r>
+              <a:rPr sz="1200" b="0">
+                <a:solidFill>
+                  <a:srgbClr val="C9DBE8"/>
+                </a:solidFill>
+                <a:latin typeface="Calibri"/>
+              </a:rPr>
+              <a:t>Görülmemiş / görülmüş halka; canlı snapshot ile saniyelik yansıma.</a:t>
+            </a:r>
+          </a:p>
+        </p:txBody>
+      </p:sp>
+      <p:sp>
+        <p:nvSpPr>
+          <p:cNvPr id="12" name="Rounded Rectangle 11"/>
           <p:cNvSpPr/>
           <p:nvPr/>
         </p:nvSpPr>
         <p:spPr>
           <a:xfrm>
-            <a:off x="630936" y="1993392"/>
-            <a:ext cx="292608" cy="292608"/>
-          </a:xfrm>
-          <a:prstGeom prst="ellipse">
+            <a:off x="6153912" y="1691640"/>
+            <a:ext cx="5367528" cy="1984248"/>
+          </a:xfrm>
+          <a:prstGeom prst="roundRect">
+            <a:avLst>
+              <a:gd name="adj" fmla="val 12000"/>
+            </a:avLst>
+          </a:prstGeom>
+          <a:solidFill>
+            <a:srgbClr val="12324A"/>
+          </a:solidFill>
+          <a:ln>
+            <a:noFill/>
+          </a:ln>
+        </p:spPr>
+        <p:style>
+          <a:lnRef idx="1">
+            <a:schemeClr val="accent1"/>
+          </a:lnRef>
+          <a:fillRef idx="3">
+            <a:schemeClr val="accent1"/>
+          </a:fillRef>
+          <a:effectRef idx="2">
+            <a:schemeClr val="accent1"/>
+          </a:effectRef>
+          <a:fontRef idx="minor">
+            <a:schemeClr val="lt1"/>
+          </a:fontRef>
+        </p:style>
+        <p:txBody>
+          <a:bodyPr rtlCol="0" anchor="ctr"/>
+          <a:lstStyle/>
+          <a:p>
+            <a:pPr algn="ctr"/>
+          </a:p>
+        </p:txBody>
+      </p:sp>
+      <p:sp>
+        <p:nvSpPr>
+          <p:cNvPr id="13" name="TextBox 12"/>
+          <p:cNvSpPr txBox="1"/>
+          <p:nvPr/>
+        </p:nvSpPr>
+        <p:spPr>
+          <a:xfrm>
+            <a:off x="6355080" y="1874520"/>
+            <a:ext cx="5001768" cy="320040"/>
+          </a:xfrm>
+          <a:prstGeom prst="rect">
+            <a:avLst/>
+          </a:prstGeom>
+          <a:noFill/>
+        </p:spPr>
+        <p:txBody>
+          <a:bodyPr wrap="square">
+            <a:spAutoFit/>
+          </a:bodyPr>
+          <a:lstStyle/>
+          <a:p>
+            <a:pPr algn="l"/>
+            <a:r>
+              <a:rPr sz="1500" b="1">
+                <a:solidFill>
+                  <a:srgbClr val="2EC4B6"/>
+                </a:solidFill>
+                <a:latin typeface="Calibri"/>
+              </a:rPr>
+              <a:t>Stream-first</a:t>
+            </a:r>
+          </a:p>
+        </p:txBody>
+      </p:sp>
+      <p:sp>
+        <p:nvSpPr>
+          <p:cNvPr id="14" name="TextBox 13"/>
+          <p:cNvSpPr txBox="1"/>
+          <p:nvPr/>
+        </p:nvSpPr>
+        <p:spPr>
+          <a:xfrm>
+            <a:off x="6355080" y="2194560"/>
+            <a:ext cx="5001768" cy="1344168"/>
+          </a:xfrm>
+          <a:prstGeom prst="rect">
+            <a:avLst/>
+          </a:prstGeom>
+          <a:noFill/>
+        </p:spPr>
+        <p:txBody>
+          <a:bodyPr wrap="square">
+            <a:spAutoFit/>
+          </a:bodyPr>
+          <a:lstStyle/>
+          <a:p>
+            <a:pPr algn="l"/>
+            <a:r>
+              <a:rPr sz="1200" b="0">
+                <a:solidFill>
+                  <a:srgbClr val="C9DBE8"/>
+                </a:solidFill>
+                <a:latin typeface="Calibri"/>
+              </a:rPr>
+              <a:t>Video tam indirme beklemez — progressive oynatma.</a:t>
+            </a:r>
+          </a:p>
+        </p:txBody>
+      </p:sp>
+      <p:sp>
+        <p:nvSpPr>
+          <p:cNvPr id="15" name="Rounded Rectangle 14"/>
+          <p:cNvSpPr/>
+          <p:nvPr/>
+        </p:nvSpPr>
+        <p:spPr>
+          <a:xfrm>
+            <a:off x="640080" y="3822192"/>
+            <a:ext cx="5367528" cy="1984248"/>
+          </a:xfrm>
+          <a:prstGeom prst="roundRect">
+            <a:avLst>
+              <a:gd name="adj" fmla="val 12000"/>
+            </a:avLst>
+          </a:prstGeom>
+          <a:solidFill>
+            <a:srgbClr val="0F3A3A"/>
+          </a:solidFill>
+          <a:ln>
+            <a:noFill/>
+          </a:ln>
+        </p:spPr>
+        <p:style>
+          <a:lnRef idx="1">
+            <a:schemeClr val="accent1"/>
+          </a:lnRef>
+          <a:fillRef idx="3">
+            <a:schemeClr val="accent1"/>
+          </a:fillRef>
+          <a:effectRef idx="2">
+            <a:schemeClr val="accent1"/>
+          </a:effectRef>
+          <a:fontRef idx="minor">
+            <a:schemeClr val="lt1"/>
+          </a:fontRef>
+        </p:style>
+        <p:txBody>
+          <a:bodyPr rtlCol="0" anchor="ctr"/>
+          <a:lstStyle/>
+          <a:p>
+            <a:pPr algn="ctr"/>
+          </a:p>
+        </p:txBody>
+      </p:sp>
+      <p:sp>
+        <p:nvSpPr>
+          <p:cNvPr id="16" name="TextBox 15"/>
+          <p:cNvSpPr txBox="1"/>
+          <p:nvPr/>
+        </p:nvSpPr>
+        <p:spPr>
+          <a:xfrm>
+            <a:off x="841248" y="4005072"/>
+            <a:ext cx="5001768" cy="320040"/>
+          </a:xfrm>
+          <a:prstGeom prst="rect">
+            <a:avLst/>
+          </a:prstGeom>
+          <a:noFill/>
+        </p:spPr>
+        <p:txBody>
+          <a:bodyPr wrap="square">
+            <a:spAutoFit/>
+          </a:bodyPr>
+          <a:lstStyle/>
+          <a:p>
+            <a:pPr algn="l"/>
+            <a:r>
+              <a:rPr sz="1500" b="1">
+                <a:solidFill>
+                  <a:srgbClr val="2EC4B6"/>
+                </a:solidFill>
+                <a:latin typeface="Calibri"/>
+              </a:rPr>
+              <a:t>Reels motoru</a:t>
+            </a:r>
+          </a:p>
+        </p:txBody>
+      </p:sp>
+      <p:sp>
+        <p:nvSpPr>
+          <p:cNvPr id="17" name="TextBox 16"/>
+          <p:cNvSpPr txBox="1"/>
+          <p:nvPr/>
+        </p:nvSpPr>
+        <p:spPr>
+          <a:xfrm>
+            <a:off x="841248" y="4325112"/>
+            <a:ext cx="5001768" cy="1344168"/>
+          </a:xfrm>
+          <a:prstGeom prst="rect">
+            <a:avLst/>
+          </a:prstGeom>
+          <a:noFill/>
+        </p:spPr>
+        <p:txBody>
+          <a:bodyPr wrap="square">
+            <a:spAutoFit/>
+          </a:bodyPr>
+          <a:lstStyle/>
+          <a:p>
+            <a:pPr algn="l"/>
+            <a:r>
+              <a:rPr sz="1200" b="0">
+                <a:solidFill>
+                  <a:srgbClr val="C9DBE8"/>
+                </a:solidFill>
+                <a:latin typeface="Calibri"/>
+              </a:rPr>
+              <a:t>Önceki / sonraki ısıtma; kaydırınca takılma azalır.</a:t>
+            </a:r>
+          </a:p>
+        </p:txBody>
+      </p:sp>
+      <p:sp>
+        <p:nvSpPr>
+          <p:cNvPr id="18" name="Rounded Rectangle 17"/>
+          <p:cNvSpPr/>
+          <p:nvPr/>
+        </p:nvSpPr>
+        <p:spPr>
+          <a:xfrm>
+            <a:off x="6153912" y="3822192"/>
+            <a:ext cx="5367528" cy="1984248"/>
+          </a:xfrm>
+          <a:prstGeom prst="roundRect">
+            <a:avLst>
+              <a:gd name="adj" fmla="val 12000"/>
+            </a:avLst>
+          </a:prstGeom>
+          <a:solidFill>
+            <a:srgbClr val="1A3348"/>
+          </a:solidFill>
+          <a:ln>
+            <a:noFill/>
+          </a:ln>
+        </p:spPr>
+        <p:style>
+          <a:lnRef idx="1">
+            <a:schemeClr val="accent1"/>
+          </a:lnRef>
+          <a:fillRef idx="3">
+            <a:schemeClr val="accent1"/>
+          </a:fillRef>
+          <a:effectRef idx="2">
+            <a:schemeClr val="accent1"/>
+          </a:effectRef>
+          <a:fontRef idx="minor">
+            <a:schemeClr val="lt1"/>
+          </a:fontRef>
+        </p:style>
+        <p:txBody>
+          <a:bodyPr rtlCol="0" anchor="ctr"/>
+          <a:lstStyle/>
+          <a:p>
+            <a:pPr algn="ctr"/>
+          </a:p>
+        </p:txBody>
+      </p:sp>
+      <p:sp>
+        <p:nvSpPr>
+          <p:cNvPr id="19" name="TextBox 18"/>
+          <p:cNvSpPr txBox="1"/>
+          <p:nvPr/>
+        </p:nvSpPr>
+        <p:spPr>
+          <a:xfrm>
+            <a:off x="6355080" y="4005072"/>
+            <a:ext cx="5001768" cy="320040"/>
+          </a:xfrm>
+          <a:prstGeom prst="rect">
+            <a:avLst/>
+          </a:prstGeom>
+          <a:noFill/>
+        </p:spPr>
+        <p:txBody>
+          <a:bodyPr wrap="square">
+            <a:spAutoFit/>
+          </a:bodyPr>
+          <a:lstStyle/>
+          <a:p>
+            <a:pPr algn="l"/>
+            <a:r>
+              <a:rPr sz="1500" b="1">
+                <a:solidFill>
+                  <a:srgbClr val="2EC4B6"/>
+                </a:solidFill>
+                <a:latin typeface="Calibri"/>
+              </a:rPr>
+              <a:t>Deep link</a:t>
+            </a:r>
+          </a:p>
+        </p:txBody>
+      </p:sp>
+      <p:sp>
+        <p:nvSpPr>
+          <p:cNvPr id="20" name="TextBox 19"/>
+          <p:cNvSpPr txBox="1"/>
+          <p:nvPr/>
+        </p:nvSpPr>
+        <p:spPr>
+          <a:xfrm>
+            <a:off x="6355080" y="4325112"/>
+            <a:ext cx="5001768" cy="1344168"/>
+          </a:xfrm>
+          <a:prstGeom prst="rect">
+            <a:avLst/>
+          </a:prstGeom>
+          <a:noFill/>
+        </p:spPr>
+        <p:txBody>
+          <a:bodyPr wrap="square">
+            <a:spAutoFit/>
+          </a:bodyPr>
+          <a:lstStyle/>
+          <a:p>
+            <a:pPr algn="l"/>
+            <a:r>
+              <a:rPr sz="1200" b="0">
+                <a:solidFill>
+                  <a:srgbClr val="C9DBE8"/>
+                </a:solidFill>
+                <a:latin typeface="Calibri"/>
+              </a:rPr>
+              <a:t>Paylaşılan hikâye / profil / etkinlik mağazaya kadar gider.</a:t>
+            </a:r>
+          </a:p>
+        </p:txBody>
+      </p:sp>
+      <p:sp>
+        <p:nvSpPr>
+          <p:cNvPr id="21" name="Rectangle 20"/>
+          <p:cNvSpPr/>
+          <p:nvPr/>
+        </p:nvSpPr>
+        <p:spPr>
+          <a:xfrm>
+            <a:off x="0" y="6473952"/>
+            <a:ext cx="12191695" cy="384048"/>
+          </a:xfrm>
+          <a:prstGeom prst="rect">
             <a:avLst/>
           </a:prstGeom>
           <a:solidFill>
@@ -6567,969 +7531,7 @@
       </p:sp>
       <p:sp>
         <p:nvSpPr>
-          <p:cNvPr id="11" name="TextBox 10"/>
-          <p:cNvSpPr txBox="1"/>
-          <p:nvPr/>
-        </p:nvSpPr>
-        <p:spPr>
-          <a:xfrm>
-            <a:off x="630936" y="2011680"/>
-            <a:ext cx="292608" cy="274320"/>
-          </a:xfrm>
-          <a:prstGeom prst="rect">
-            <a:avLst/>
-          </a:prstGeom>
-          <a:noFill/>
-        </p:spPr>
-        <p:txBody>
-          <a:bodyPr wrap="square">
-            <a:spAutoFit/>
-          </a:bodyPr>
-          <a:lstStyle/>
-          <a:p>
-            <a:pPr algn="ctr"/>
-            <a:r>
-              <a:rPr sz="1200" b="1">
-                <a:solidFill>
-                  <a:srgbClr val="FFFFFF"/>
-                </a:solidFill>
-                <a:latin typeface="Calibri"/>
-              </a:rPr>
-              <a:t>1</a:t>
-            </a:r>
-          </a:p>
-        </p:txBody>
-      </p:sp>
-      <p:sp>
-        <p:nvSpPr>
-          <p:cNvPr id="12" name="TextBox 11"/>
-          <p:cNvSpPr txBox="1"/>
-          <p:nvPr/>
-        </p:nvSpPr>
-        <p:spPr>
-          <a:xfrm>
-            <a:off x="1005840" y="1993392"/>
-            <a:ext cx="882396" cy="292608"/>
-          </a:xfrm>
-          <a:prstGeom prst="rect">
-            <a:avLst/>
-          </a:prstGeom>
-          <a:noFill/>
-        </p:spPr>
-        <p:txBody>
-          <a:bodyPr wrap="square">
-            <a:spAutoFit/>
-          </a:bodyPr>
-          <a:lstStyle/>
-          <a:p>
-            <a:pPr algn="l"/>
-            <a:r>
-              <a:rPr sz="1300" b="1">
-                <a:solidFill>
-                  <a:srgbClr val="0B1F33"/>
-                </a:solidFill>
-                <a:latin typeface="Calibri"/>
-              </a:rPr>
-              <a:t>Oluştur</a:t>
-            </a:r>
-          </a:p>
-        </p:txBody>
-      </p:sp>
-      <p:sp>
-        <p:nvSpPr>
-          <p:cNvPr id="13" name="TextBox 12"/>
-          <p:cNvSpPr txBox="1"/>
-          <p:nvPr/>
-        </p:nvSpPr>
-        <p:spPr>
-          <a:xfrm>
-            <a:off x="1005840" y="2331720"/>
-            <a:ext cx="882396" cy="411480"/>
-          </a:xfrm>
-          <a:prstGeom prst="rect">
-            <a:avLst/>
-          </a:prstGeom>
-          <a:noFill/>
-        </p:spPr>
-        <p:txBody>
-          <a:bodyPr wrap="square">
-            <a:spAutoFit/>
-          </a:bodyPr>
-          <a:lstStyle/>
-          <a:p>
-            <a:pPr algn="l"/>
-            <a:r>
-              <a:rPr sz="1100" b="0">
-                <a:solidFill>
-                  <a:srgbClr val="5A6A7A"/>
-                </a:solidFill>
-                <a:latin typeface="Calibri"/>
-              </a:rPr>
-              <a:t>Tarih · yer · görsel</a:t>
-            </a:r>
-          </a:p>
-        </p:txBody>
-      </p:sp>
-      <p:cxnSp>
-        <p:nvCxnSpPr>
-          <p:cNvPr id="14" name="Connector 13"/>
-          <p:cNvCxnSpPr/>
-          <p:nvPr/>
-        </p:nvCxnSpPr>
-        <p:spPr>
-          <a:xfrm>
-            <a:off x="2025396.0" y="2354580.0"/>
-            <a:ext cx="164592.0" cy="0.0"/>
-          </a:xfrm>
-          <a:prstGeom prst="line">
-            <a:avLst/>
-          </a:prstGeom>
-          <a:ln w="25400">
-            <a:solidFill>
-              <a:srgbClr val="1FA6A0"/>
-            </a:solidFill>
-          </a:ln>
-        </p:spPr>
-        <p:style>
-          <a:lnRef idx="2">
-            <a:schemeClr val="accent1"/>
-          </a:lnRef>
-          <a:fillRef idx="0">
-            <a:schemeClr val="accent1"/>
-          </a:fillRef>
-          <a:effectRef idx="1">
-            <a:schemeClr val="accent1"/>
-          </a:effectRef>
-          <a:fontRef idx="minor">
-            <a:schemeClr val="tx1"/>
-          </a:fontRef>
-        </p:style>
-      </p:cxnSp>
-      <p:sp>
-        <p:nvSpPr>
-          <p:cNvPr id="15" name="Rounded Rectangle 14"/>
-          <p:cNvSpPr/>
-          <p:nvPr/>
-        </p:nvSpPr>
-        <p:spPr>
-          <a:xfrm>
-            <a:off x="2189988" y="1828800"/>
-            <a:ext cx="1522476" cy="1051560"/>
-          </a:xfrm>
-          <a:prstGeom prst="roundRect">
-            <a:avLst>
-              <a:gd name="adj" fmla="val 12000"/>
-            </a:avLst>
-          </a:prstGeom>
-          <a:solidFill>
-            <a:srgbClr val="E4F0F4"/>
-          </a:solidFill>
-          <a:ln>
-            <a:noFill/>
-          </a:ln>
-        </p:spPr>
-        <p:style>
-          <a:lnRef idx="1">
-            <a:schemeClr val="accent1"/>
-          </a:lnRef>
-          <a:fillRef idx="3">
-            <a:schemeClr val="accent1"/>
-          </a:fillRef>
-          <a:effectRef idx="2">
-            <a:schemeClr val="accent1"/>
-          </a:effectRef>
-          <a:fontRef idx="minor">
-            <a:schemeClr val="lt1"/>
-          </a:fontRef>
-        </p:style>
-        <p:txBody>
-          <a:bodyPr rtlCol="0" anchor="ctr"/>
-          <a:lstStyle/>
-          <a:p>
-            <a:pPr algn="ctr"/>
-          </a:p>
-        </p:txBody>
-      </p:sp>
-      <p:sp>
-        <p:nvSpPr>
-          <p:cNvPr id="16" name="Oval 15"/>
-          <p:cNvSpPr/>
-          <p:nvPr/>
-        </p:nvSpPr>
-        <p:spPr>
-          <a:xfrm>
-            <a:off x="2318004" y="1993392"/>
-            <a:ext cx="292608" cy="292608"/>
-          </a:xfrm>
-          <a:prstGeom prst="ellipse">
-            <a:avLst/>
-          </a:prstGeom>
-          <a:solidFill>
-            <a:srgbClr val="1FA6A0"/>
-          </a:solidFill>
-          <a:ln>
-            <a:noFill/>
-          </a:ln>
-        </p:spPr>
-        <p:style>
-          <a:lnRef idx="1">
-            <a:schemeClr val="accent1"/>
-          </a:lnRef>
-          <a:fillRef idx="3">
-            <a:schemeClr val="accent1"/>
-          </a:fillRef>
-          <a:effectRef idx="2">
-            <a:schemeClr val="accent1"/>
-          </a:effectRef>
-          <a:fontRef idx="minor">
-            <a:schemeClr val="lt1"/>
-          </a:fontRef>
-        </p:style>
-        <p:txBody>
-          <a:bodyPr rtlCol="0" anchor="ctr"/>
-          <a:lstStyle/>
-          <a:p>
-            <a:pPr algn="ctr"/>
-          </a:p>
-        </p:txBody>
-      </p:sp>
-      <p:sp>
-        <p:nvSpPr>
-          <p:cNvPr id="17" name="TextBox 16"/>
-          <p:cNvSpPr txBox="1"/>
-          <p:nvPr/>
-        </p:nvSpPr>
-        <p:spPr>
-          <a:xfrm>
-            <a:off x="2318004" y="2011680"/>
-            <a:ext cx="292608" cy="274320"/>
-          </a:xfrm>
-          <a:prstGeom prst="rect">
-            <a:avLst/>
-          </a:prstGeom>
-          <a:noFill/>
-        </p:spPr>
-        <p:txBody>
-          <a:bodyPr wrap="square">
-            <a:spAutoFit/>
-          </a:bodyPr>
-          <a:lstStyle/>
-          <a:p>
-            <a:pPr algn="ctr"/>
-            <a:r>
-              <a:rPr sz="1200" b="1">
-                <a:solidFill>
-                  <a:srgbClr val="FFFFFF"/>
-                </a:solidFill>
-                <a:latin typeface="Calibri"/>
-              </a:rPr>
-              <a:t>2</a:t>
-            </a:r>
-          </a:p>
-        </p:txBody>
-      </p:sp>
-      <p:sp>
-        <p:nvSpPr>
-          <p:cNvPr id="18" name="TextBox 17"/>
-          <p:cNvSpPr txBox="1"/>
-          <p:nvPr/>
-        </p:nvSpPr>
-        <p:spPr>
-          <a:xfrm>
-            <a:off x="2692908" y="1993392"/>
-            <a:ext cx="882396" cy="292608"/>
-          </a:xfrm>
-          <a:prstGeom prst="rect">
-            <a:avLst/>
-          </a:prstGeom>
-          <a:noFill/>
-        </p:spPr>
-        <p:txBody>
-          <a:bodyPr wrap="square">
-            <a:spAutoFit/>
-          </a:bodyPr>
-          <a:lstStyle/>
-          <a:p>
-            <a:pPr algn="l"/>
-            <a:r>
-              <a:rPr sz="1300" b="1">
-                <a:solidFill>
-                  <a:srgbClr val="0B1F33"/>
-                </a:solidFill>
-                <a:latin typeface="Calibri"/>
-              </a:rPr>
-              <a:t>Yayınla</a:t>
-            </a:r>
-          </a:p>
-        </p:txBody>
-      </p:sp>
-      <p:sp>
-        <p:nvSpPr>
-          <p:cNvPr id="19" name="TextBox 18"/>
-          <p:cNvSpPr txBox="1"/>
-          <p:nvPr/>
-        </p:nvSpPr>
-        <p:spPr>
-          <a:xfrm>
-            <a:off x="2692908" y="2331720"/>
-            <a:ext cx="882396" cy="411480"/>
-          </a:xfrm>
-          <a:prstGeom prst="rect">
-            <a:avLst/>
-          </a:prstGeom>
-          <a:noFill/>
-        </p:spPr>
-        <p:txBody>
-          <a:bodyPr wrap="square">
-            <a:spAutoFit/>
-          </a:bodyPr>
-          <a:lstStyle/>
-          <a:p>
-            <a:pPr algn="l"/>
-            <a:r>
-              <a:rPr sz="1100" b="0">
-                <a:solidFill>
-                  <a:srgbClr val="5A6A7A"/>
-                </a:solidFill>
-                <a:latin typeface="Calibri"/>
-              </a:rPr>
-              <a:t>Akış + hikâye</a:t>
-            </a:r>
-          </a:p>
-        </p:txBody>
-      </p:sp>
-      <p:cxnSp>
-        <p:nvCxnSpPr>
-          <p:cNvPr id="20" name="Connector 19"/>
-          <p:cNvCxnSpPr/>
-          <p:nvPr/>
-        </p:nvCxnSpPr>
-        <p:spPr>
-          <a:xfrm>
-            <a:off x="3712464.0" y="2354580.0"/>
-            <a:ext cx="164592.0" cy="0.0"/>
-          </a:xfrm>
-          <a:prstGeom prst="line">
-            <a:avLst/>
-          </a:prstGeom>
-          <a:ln w="25400">
-            <a:solidFill>
-              <a:srgbClr val="1FA6A0"/>
-            </a:solidFill>
-          </a:ln>
-        </p:spPr>
-        <p:style>
-          <a:lnRef idx="2">
-            <a:schemeClr val="accent1"/>
-          </a:lnRef>
-          <a:fillRef idx="0">
-            <a:schemeClr val="accent1"/>
-          </a:fillRef>
-          <a:effectRef idx="1">
-            <a:schemeClr val="accent1"/>
-          </a:effectRef>
-          <a:fontRef idx="minor">
-            <a:schemeClr val="tx1"/>
-          </a:fontRef>
-        </p:style>
-      </p:cxnSp>
-      <p:sp>
-        <p:nvSpPr>
-          <p:cNvPr id="21" name="Rounded Rectangle 20"/>
-          <p:cNvSpPr/>
-          <p:nvPr/>
-        </p:nvSpPr>
-        <p:spPr>
-          <a:xfrm>
-            <a:off x="3877056" y="1828800"/>
-            <a:ext cx="1522476" cy="1051560"/>
-          </a:xfrm>
-          <a:prstGeom prst="roundRect">
-            <a:avLst>
-              <a:gd name="adj" fmla="val 12000"/>
-            </a:avLst>
-          </a:prstGeom>
-          <a:solidFill>
-            <a:srgbClr val="EEF5F8"/>
-          </a:solidFill>
-          <a:ln>
-            <a:noFill/>
-          </a:ln>
-        </p:spPr>
-        <p:style>
-          <a:lnRef idx="1">
-            <a:schemeClr val="accent1"/>
-          </a:lnRef>
-          <a:fillRef idx="3">
-            <a:schemeClr val="accent1"/>
-          </a:fillRef>
-          <a:effectRef idx="2">
-            <a:schemeClr val="accent1"/>
-          </a:effectRef>
-          <a:fontRef idx="minor">
-            <a:schemeClr val="lt1"/>
-          </a:fontRef>
-        </p:style>
-        <p:txBody>
-          <a:bodyPr rtlCol="0" anchor="ctr"/>
-          <a:lstStyle/>
-          <a:p>
-            <a:pPr algn="ctr"/>
-          </a:p>
-        </p:txBody>
-      </p:sp>
-      <p:sp>
-        <p:nvSpPr>
-          <p:cNvPr id="22" name="Oval 21"/>
-          <p:cNvSpPr/>
-          <p:nvPr/>
-        </p:nvSpPr>
-        <p:spPr>
-          <a:xfrm>
-            <a:off x="4005072" y="1993392"/>
-            <a:ext cx="292608" cy="292608"/>
-          </a:xfrm>
-          <a:prstGeom prst="ellipse">
-            <a:avLst/>
-          </a:prstGeom>
-          <a:solidFill>
-            <a:srgbClr val="1FA6A0"/>
-          </a:solidFill>
-          <a:ln>
-            <a:noFill/>
-          </a:ln>
-        </p:spPr>
-        <p:style>
-          <a:lnRef idx="1">
-            <a:schemeClr val="accent1"/>
-          </a:lnRef>
-          <a:fillRef idx="3">
-            <a:schemeClr val="accent1"/>
-          </a:fillRef>
-          <a:effectRef idx="2">
-            <a:schemeClr val="accent1"/>
-          </a:effectRef>
-          <a:fontRef idx="minor">
-            <a:schemeClr val="lt1"/>
-          </a:fontRef>
-        </p:style>
-        <p:txBody>
-          <a:bodyPr rtlCol="0" anchor="ctr"/>
-          <a:lstStyle/>
-          <a:p>
-            <a:pPr algn="ctr"/>
-          </a:p>
-        </p:txBody>
-      </p:sp>
-      <p:sp>
-        <p:nvSpPr>
-          <p:cNvPr id="23" name="TextBox 22"/>
-          <p:cNvSpPr txBox="1"/>
-          <p:nvPr/>
-        </p:nvSpPr>
-        <p:spPr>
-          <a:xfrm>
-            <a:off x="4005072" y="2011680"/>
-            <a:ext cx="292608" cy="274320"/>
-          </a:xfrm>
-          <a:prstGeom prst="rect">
-            <a:avLst/>
-          </a:prstGeom>
-          <a:noFill/>
-        </p:spPr>
-        <p:txBody>
-          <a:bodyPr wrap="square">
-            <a:spAutoFit/>
-          </a:bodyPr>
-          <a:lstStyle/>
-          <a:p>
-            <a:pPr algn="ctr"/>
-            <a:r>
-              <a:rPr sz="1200" b="1">
-                <a:solidFill>
-                  <a:srgbClr val="FFFFFF"/>
-                </a:solidFill>
-                <a:latin typeface="Calibri"/>
-              </a:rPr>
-              <a:t>3</a:t>
-            </a:r>
-          </a:p>
-        </p:txBody>
-      </p:sp>
-      <p:sp>
-        <p:nvSpPr>
-          <p:cNvPr id="24" name="TextBox 23"/>
-          <p:cNvSpPr txBox="1"/>
-          <p:nvPr/>
-        </p:nvSpPr>
-        <p:spPr>
-          <a:xfrm>
-            <a:off x="4379976" y="1993392"/>
-            <a:ext cx="882396" cy="292608"/>
-          </a:xfrm>
-          <a:prstGeom prst="rect">
-            <a:avLst/>
-          </a:prstGeom>
-          <a:noFill/>
-        </p:spPr>
-        <p:txBody>
-          <a:bodyPr wrap="square">
-            <a:spAutoFit/>
-          </a:bodyPr>
-          <a:lstStyle/>
-          <a:p>
-            <a:pPr algn="l"/>
-            <a:r>
-              <a:rPr sz="1300" b="1">
-                <a:solidFill>
-                  <a:srgbClr val="0B1F33"/>
-                </a:solidFill>
-                <a:latin typeface="Calibri"/>
-              </a:rPr>
-              <a:t>Topla</a:t>
-            </a:r>
-          </a:p>
-        </p:txBody>
-      </p:sp>
-      <p:sp>
-        <p:nvSpPr>
-          <p:cNvPr id="25" name="TextBox 24"/>
-          <p:cNvSpPr txBox="1"/>
-          <p:nvPr/>
-        </p:nvSpPr>
-        <p:spPr>
-          <a:xfrm>
-            <a:off x="4379976" y="2331720"/>
-            <a:ext cx="882396" cy="411480"/>
-          </a:xfrm>
-          <a:prstGeom prst="rect">
-            <a:avLst/>
-          </a:prstGeom>
-          <a:noFill/>
-        </p:spPr>
-        <p:txBody>
-          <a:bodyPr wrap="square">
-            <a:spAutoFit/>
-          </a:bodyPr>
-          <a:lstStyle/>
-          <a:p>
-            <a:pPr algn="l"/>
-            <a:r>
-              <a:rPr sz="1100" b="0">
-                <a:solidFill>
-                  <a:srgbClr val="5A6A7A"/>
-                </a:solidFill>
-                <a:latin typeface="Calibri"/>
-              </a:rPr>
-              <a:t>Başvuru + kota</a:t>
-            </a:r>
-          </a:p>
-        </p:txBody>
-      </p:sp>
-      <p:cxnSp>
-        <p:nvCxnSpPr>
-          <p:cNvPr id="26" name="Connector 25"/>
-          <p:cNvCxnSpPr/>
-          <p:nvPr/>
-        </p:nvCxnSpPr>
-        <p:spPr>
-          <a:xfrm>
-            <a:off x="5399532.0" y="2354580.0"/>
-            <a:ext cx="164592.0" cy="0.0"/>
-          </a:xfrm>
-          <a:prstGeom prst="line">
-            <a:avLst/>
-          </a:prstGeom>
-          <a:ln w="25400">
-            <a:solidFill>
-              <a:srgbClr val="1FA6A0"/>
-            </a:solidFill>
-          </a:ln>
-        </p:spPr>
-        <p:style>
-          <a:lnRef idx="2">
-            <a:schemeClr val="accent1"/>
-          </a:lnRef>
-          <a:fillRef idx="0">
-            <a:schemeClr val="accent1"/>
-          </a:fillRef>
-          <a:effectRef idx="1">
-            <a:schemeClr val="accent1"/>
-          </a:effectRef>
-          <a:fontRef idx="minor">
-            <a:schemeClr val="tx1"/>
-          </a:fontRef>
-        </p:style>
-      </p:cxnSp>
-      <p:sp>
-        <p:nvSpPr>
-          <p:cNvPr id="27" name="Rounded Rectangle 26"/>
-          <p:cNvSpPr/>
-          <p:nvPr/>
-        </p:nvSpPr>
-        <p:spPr>
-          <a:xfrm>
-            <a:off x="5564124" y="1828800"/>
-            <a:ext cx="1522476" cy="1051560"/>
-          </a:xfrm>
-          <a:prstGeom prst="roundRect">
-            <a:avLst>
-              <a:gd name="adj" fmla="val 12000"/>
-            </a:avLst>
-          </a:prstGeom>
-          <a:solidFill>
-            <a:srgbClr val="E4F0F4"/>
-          </a:solidFill>
-          <a:ln>
-            <a:noFill/>
-          </a:ln>
-        </p:spPr>
-        <p:style>
-          <a:lnRef idx="1">
-            <a:schemeClr val="accent1"/>
-          </a:lnRef>
-          <a:fillRef idx="3">
-            <a:schemeClr val="accent1"/>
-          </a:fillRef>
-          <a:effectRef idx="2">
-            <a:schemeClr val="accent1"/>
-          </a:effectRef>
-          <a:fontRef idx="minor">
-            <a:schemeClr val="lt1"/>
-          </a:fontRef>
-        </p:style>
-        <p:txBody>
-          <a:bodyPr rtlCol="0" anchor="ctr"/>
-          <a:lstStyle/>
-          <a:p>
-            <a:pPr algn="ctr"/>
-          </a:p>
-        </p:txBody>
-      </p:sp>
-      <p:sp>
-        <p:nvSpPr>
-          <p:cNvPr id="28" name="Oval 27"/>
-          <p:cNvSpPr/>
-          <p:nvPr/>
-        </p:nvSpPr>
-        <p:spPr>
-          <a:xfrm>
-            <a:off x="5692140" y="1993392"/>
-            <a:ext cx="292608" cy="292608"/>
-          </a:xfrm>
-          <a:prstGeom prst="ellipse">
-            <a:avLst/>
-          </a:prstGeom>
-          <a:solidFill>
-            <a:srgbClr val="1FA6A0"/>
-          </a:solidFill>
-          <a:ln>
-            <a:noFill/>
-          </a:ln>
-        </p:spPr>
-        <p:style>
-          <a:lnRef idx="1">
-            <a:schemeClr val="accent1"/>
-          </a:lnRef>
-          <a:fillRef idx="3">
-            <a:schemeClr val="accent1"/>
-          </a:fillRef>
-          <a:effectRef idx="2">
-            <a:schemeClr val="accent1"/>
-          </a:effectRef>
-          <a:fontRef idx="minor">
-            <a:schemeClr val="lt1"/>
-          </a:fontRef>
-        </p:style>
-        <p:txBody>
-          <a:bodyPr rtlCol="0" anchor="ctr"/>
-          <a:lstStyle/>
-          <a:p>
-            <a:pPr algn="ctr"/>
-          </a:p>
-        </p:txBody>
-      </p:sp>
-      <p:sp>
-        <p:nvSpPr>
-          <p:cNvPr id="29" name="TextBox 28"/>
-          <p:cNvSpPr txBox="1"/>
-          <p:nvPr/>
-        </p:nvSpPr>
-        <p:spPr>
-          <a:xfrm>
-            <a:off x="5692140" y="2011680"/>
-            <a:ext cx="292608" cy="274320"/>
-          </a:xfrm>
-          <a:prstGeom prst="rect">
-            <a:avLst/>
-          </a:prstGeom>
-          <a:noFill/>
-        </p:spPr>
-        <p:txBody>
-          <a:bodyPr wrap="square">
-            <a:spAutoFit/>
-          </a:bodyPr>
-          <a:lstStyle/>
-          <a:p>
-            <a:pPr algn="ctr"/>
-            <a:r>
-              <a:rPr sz="1200" b="1">
-                <a:solidFill>
-                  <a:srgbClr val="FFFFFF"/>
-                </a:solidFill>
-                <a:latin typeface="Calibri"/>
-              </a:rPr>
-              <a:t>4</a:t>
-            </a:r>
-          </a:p>
-        </p:txBody>
-      </p:sp>
-      <p:sp>
-        <p:nvSpPr>
-          <p:cNvPr id="30" name="TextBox 29"/>
-          <p:cNvSpPr txBox="1"/>
-          <p:nvPr/>
-        </p:nvSpPr>
-        <p:spPr>
-          <a:xfrm>
-            <a:off x="6067044" y="1993392"/>
-            <a:ext cx="882396" cy="292608"/>
-          </a:xfrm>
-          <a:prstGeom prst="rect">
-            <a:avLst/>
-          </a:prstGeom>
-          <a:noFill/>
-        </p:spPr>
-        <p:txBody>
-          <a:bodyPr wrap="square">
-            <a:spAutoFit/>
-          </a:bodyPr>
-          <a:lstStyle/>
-          <a:p>
-            <a:pPr algn="l"/>
-            <a:r>
-              <a:rPr sz="1300" b="1">
-                <a:solidFill>
-                  <a:srgbClr val="0B1F33"/>
-                </a:solidFill>
-                <a:latin typeface="Calibri"/>
-              </a:rPr>
-              <a:t>Yönet</a:t>
-            </a:r>
-          </a:p>
-        </p:txBody>
-      </p:sp>
-      <p:sp>
-        <p:nvSpPr>
-          <p:cNvPr id="31" name="TextBox 30"/>
-          <p:cNvSpPr txBox="1"/>
-          <p:nvPr/>
-        </p:nvSpPr>
-        <p:spPr>
-          <a:xfrm>
-            <a:off x="6067044" y="2331720"/>
-            <a:ext cx="882396" cy="411480"/>
-          </a:xfrm>
-          <a:prstGeom prst="rect">
-            <a:avLst/>
-          </a:prstGeom>
-          <a:noFill/>
-        </p:spPr>
-        <p:txBody>
-          <a:bodyPr wrap="square">
-            <a:spAutoFit/>
-          </a:bodyPr>
-          <a:lstStyle/>
-          <a:p>
-            <a:pPr algn="l"/>
-            <a:r>
-              <a:rPr sz="1100" b="0">
-                <a:solidFill>
-                  <a:srgbClr val="5A6A7A"/>
-                </a:solidFill>
-                <a:latin typeface="Calibri"/>
-              </a:rPr>
-              <a:t>Katılım takibi</a:t>
-            </a:r>
-          </a:p>
-        </p:txBody>
-      </p:sp>
-      <p:sp>
-        <p:nvSpPr>
-          <p:cNvPr id="32" name="TextBox 31"/>
-          <p:cNvSpPr txBox="1"/>
-          <p:nvPr/>
-        </p:nvSpPr>
-        <p:spPr>
-          <a:xfrm>
-            <a:off x="502920" y="3246120"/>
-            <a:ext cx="6492240" cy="365760"/>
-          </a:xfrm>
-          <a:prstGeom prst="rect">
-            <a:avLst/>
-          </a:prstGeom>
-          <a:noFill/>
-        </p:spPr>
-        <p:txBody>
-          <a:bodyPr wrap="square">
-            <a:spAutoFit/>
-          </a:bodyPr>
-          <a:lstStyle/>
-          <a:p>
-            <a:pPr algn="l"/>
-            <a:r>
-              <a:rPr sz="1600" b="1">
-                <a:solidFill>
-                  <a:srgbClr val="0B1F33"/>
-                </a:solidFill>
-                <a:latin typeface="Calibri"/>
-              </a:rPr>
-              <a:t>Topluluk için kazanım</a:t>
-            </a:r>
-          </a:p>
-        </p:txBody>
-      </p:sp>
-      <p:sp>
-        <p:nvSpPr>
-          <p:cNvPr id="33" name="TextBox 32"/>
-          <p:cNvSpPr txBox="1"/>
-          <p:nvPr/>
-        </p:nvSpPr>
-        <p:spPr>
-          <a:xfrm>
-            <a:off x="502920" y="3657600"/>
-            <a:ext cx="6400800" cy="3200400"/>
-          </a:xfrm>
-          <a:prstGeom prst="rect">
-            <a:avLst/>
-          </a:prstGeom>
-          <a:noFill/>
-        </p:spPr>
-        <p:txBody>
-          <a:bodyPr wrap="square">
-            <a:spAutoFit/>
-          </a:bodyPr>
-          <a:lstStyle/>
-          <a:p>
-            <a:pPr>
-              <a:spcAft>
-                <a:spcPts val="800"/>
-              </a:spcAft>
-            </a:pPr>
-            <a:r>
-              <a:rPr sz="1300" b="0">
-                <a:solidFill>
-                  <a:srgbClr val="1A2B3A"/>
-                </a:solidFill>
-                <a:latin typeface="Calibri"/>
-              </a:rPr>
-              <a:t>•  Dağınık form ve mesaj trafiği azalır</a:t>
-            </a:r>
-          </a:p>
-          <a:p>
-            <a:pPr>
-              <a:spcAft>
-                <a:spcPts val="800"/>
-              </a:spcAft>
-            </a:pPr>
-            <a:r>
-              <a:rPr sz="1300" b="0">
-                <a:solidFill>
-                  <a:srgbClr val="1A2B3A"/>
-                </a:solidFill>
-                <a:latin typeface="Calibri"/>
-              </a:rPr>
-              <a:t>•  Kontenjan ve son başvuru net görünür</a:t>
-            </a:r>
-          </a:p>
-          <a:p>
-            <a:pPr>
-              <a:spcAft>
-                <a:spcPts val="800"/>
-              </a:spcAft>
-            </a:pPr>
-            <a:r>
-              <a:rPr sz="1300" b="0">
-                <a:solidFill>
-                  <a:srgbClr val="1A2B3A"/>
-                </a:solidFill>
-                <a:latin typeface="Calibri"/>
-              </a:rPr>
-              <a:t>•  Üyeler duyuruyu kampüs akışında keşfeder</a:t>
-            </a:r>
-          </a:p>
-        </p:txBody>
-      </p:sp>
-      <p:pic>
-        <p:nvPicPr>
-          <p:cNvPr id="34" name="Picture 33" descr="06_events.png"/>
-          <p:cNvPicPr>
-            <a:picLocks noChangeAspect="1"/>
-          </p:cNvPicPr>
-          <p:nvPr/>
-        </p:nvPicPr>
-        <p:blipFill>
-          <a:blip r:embed="rId3"/>
-          <a:stretch>
-            <a:fillRect/>
-          </a:stretch>
-        </p:blipFill>
-        <p:spPr>
-          <a:xfrm>
-            <a:off x="8679433" y="1508760"/>
-            <a:ext cx="2072133" cy="4663440"/>
-          </a:xfrm>
-          <a:prstGeom prst="rect">
-            <a:avLst/>
-          </a:prstGeom>
-        </p:spPr>
-      </p:pic>
-      <p:sp>
-        <p:nvSpPr>
-          <p:cNvPr id="35" name="Rectangle 34"/>
-          <p:cNvSpPr/>
-          <p:nvPr/>
-        </p:nvSpPr>
-        <p:spPr>
-          <a:xfrm>
-            <a:off x="0" y="6473952"/>
-            <a:ext cx="12191695" cy="384048"/>
-          </a:xfrm>
-          <a:prstGeom prst="rect">
-            <a:avLst/>
-          </a:prstGeom>
-          <a:solidFill>
-            <a:srgbClr val="1FA6A0"/>
-          </a:solidFill>
-          <a:ln>
-            <a:noFill/>
-          </a:ln>
-        </p:spPr>
-        <p:style>
-          <a:lnRef idx="1">
-            <a:schemeClr val="accent1"/>
-          </a:lnRef>
-          <a:fillRef idx="3">
-            <a:schemeClr val="accent1"/>
-          </a:fillRef>
-          <a:effectRef idx="2">
-            <a:schemeClr val="accent1"/>
-          </a:effectRef>
-          <a:fontRef idx="minor">
-            <a:schemeClr val="lt1"/>
-          </a:fontRef>
-        </p:style>
-        <p:txBody>
-          <a:bodyPr rtlCol="0" anchor="ctr"/>
-          <a:lstStyle/>
-          <a:p>
-            <a:pPr algn="ctr"/>
-          </a:p>
-        </p:txBody>
-      </p:sp>
-      <p:sp>
-        <p:nvSpPr>
-          <p:cNvPr id="36" name="TextBox 35"/>
+          <p:cNvPr id="22" name="TextBox 21"/>
           <p:cNvSpPr txBox="1"/>
           <p:nvPr/>
         </p:nvSpPr>
@@ -7564,7 +7566,7 @@
       </p:sp>
       <p:sp>
         <p:nvSpPr>
-          <p:cNvPr id="37" name="TextBox 36"/>
+          <p:cNvPr id="23" name="TextBox 22"/>
           <p:cNvSpPr txBox="1"/>
           <p:nvPr/>
         </p:nvSpPr>
@@ -7592,7 +7594,7 @@
                 </a:solidFill>
                 <a:latin typeface="Calibri"/>
               </a:rPr>
-              <a:t>4 / 7</a:t>
+              <a:t>4 / 9</a:t>
             </a:r>
           </a:p>
         </p:txBody>
@@ -7782,7 +7784,7 @@
                 </a:solidFill>
                 <a:latin typeface="Calibri"/>
               </a:rPr>
-              <a:t>RESMİ HESAP</a:t>
+              <a:t>ETKİNLİK</a:t>
             </a:r>
           </a:p>
         </p:txBody>
@@ -7817,7 +7819,7 @@
                 </a:solidFill>
                 <a:latin typeface="Calibri"/>
               </a:rPr>
-              <a:t>Topluluk hesabınızı aktive edin</a:t>
+              <a:t>Başvuru, kontenjan ve hatırlatma tek yerde</a:t>
             </a:r>
           </a:p>
         </p:txBody>
@@ -7874,7 +7876,7 @@
         <p:spPr>
           <a:xfrm>
             <a:off x="502920" y="1828800"/>
-            <a:ext cx="2665476" cy="1051560"/>
+            <a:ext cx="1522476" cy="1051560"/>
           </a:xfrm>
           <a:prstGeom prst="roundRect">
             <a:avLst>
@@ -7997,7 +7999,7 @@
         <p:spPr>
           <a:xfrm>
             <a:off x="1005840" y="1993392"/>
-            <a:ext cx="2025396" cy="292608"/>
+            <a:ext cx="882396" cy="292608"/>
           </a:xfrm>
           <a:prstGeom prst="rect">
             <a:avLst/>
@@ -8018,7 +8020,7 @@
                 </a:solidFill>
                 <a:latin typeface="Calibri"/>
               </a:rPr>
-              <a:t>Başvuru</a:t>
+              <a:t>Oluştur</a:t>
             </a:r>
           </a:p>
         </p:txBody>
@@ -8032,7 +8034,7 @@
         <p:spPr>
           <a:xfrm>
             <a:off x="1005840" y="2331720"/>
-            <a:ext cx="2025396" cy="411480"/>
+            <a:ext cx="882396" cy="411480"/>
           </a:xfrm>
           <a:prstGeom prst="rect">
             <a:avLst/>
@@ -8053,7 +8055,7 @@
                 </a:solidFill>
                 <a:latin typeface="Calibri"/>
               </a:rPr>
-              <a:t>Topluluk adı ve yetkili</a:t>
+              <a:t>Tarih · yer · görsel</a:t>
             </a:r>
           </a:p>
         </p:txBody>
@@ -8066,7 +8068,7 @@
         </p:nvCxnSpPr>
         <p:spPr>
           <a:xfrm>
-            <a:off x="3168396.0" y="2354580.0"/>
+            <a:off x="2025396.0" y="2354580.0"/>
             <a:ext cx="164592.0" cy="0.0"/>
           </a:xfrm>
           <a:prstGeom prst="line">
@@ -8101,8 +8103,8 @@
         </p:nvSpPr>
         <p:spPr>
           <a:xfrm>
-            <a:off x="3332988" y="1828800"/>
-            <a:ext cx="2665476" cy="1051560"/>
+            <a:off x="2189988" y="1828800"/>
+            <a:ext cx="1522476" cy="1051560"/>
           </a:xfrm>
           <a:prstGeom prst="roundRect">
             <a:avLst>
@@ -8146,7 +8148,7 @@
         </p:nvSpPr>
         <p:spPr>
           <a:xfrm>
-            <a:off x="3461004" y="1993392"/>
+            <a:off x="2318004" y="1993392"/>
             <a:ext cx="292608" cy="292608"/>
           </a:xfrm>
           <a:prstGeom prst="ellipse">
@@ -8189,7 +8191,7 @@
         </p:nvSpPr>
         <p:spPr>
           <a:xfrm>
-            <a:off x="3461004" y="2011680"/>
+            <a:off x="2318004" y="2011680"/>
             <a:ext cx="292608" cy="274320"/>
           </a:xfrm>
           <a:prstGeom prst="rect">
@@ -8224,8 +8226,8 @@
         </p:nvSpPr>
         <p:spPr>
           <a:xfrm>
-            <a:off x="3835908" y="1993392"/>
-            <a:ext cx="2025396" cy="292608"/>
+            <a:off x="2692908" y="1993392"/>
+            <a:ext cx="882396" cy="292608"/>
           </a:xfrm>
           <a:prstGeom prst="rect">
             <a:avLst/>
@@ -8246,7 +8248,7 @@
                 </a:solidFill>
                 <a:latin typeface="Calibri"/>
               </a:rPr>
-              <a:t>Doğrulama</a:t>
+              <a:t>Yayınla</a:t>
             </a:r>
           </a:p>
         </p:txBody>
@@ -8259,8 +8261,8 @@
         </p:nvSpPr>
         <p:spPr>
           <a:xfrm>
-            <a:off x="3835908" y="2331720"/>
-            <a:ext cx="2025396" cy="411480"/>
+            <a:off x="2692908" y="2331720"/>
+            <a:ext cx="882396" cy="411480"/>
           </a:xfrm>
           <a:prstGeom prst="rect">
             <a:avLst/>
@@ -8281,7 +8283,7 @@
                 </a:solidFill>
                 <a:latin typeface="Calibri"/>
               </a:rPr>
-              <a:t>Üniversite / danışman</a:t>
+              <a:t>Akış + hikâye + Reels</a:t>
             </a:r>
           </a:p>
         </p:txBody>
@@ -8294,7 +8296,7 @@
         </p:nvCxnSpPr>
         <p:spPr>
           <a:xfrm>
-            <a:off x="5998464.0" y="2354580.0"/>
+            <a:off x="3712464.0" y="2354580.0"/>
             <a:ext cx="164592.0" cy="0.0"/>
           </a:xfrm>
           <a:prstGeom prst="line">
@@ -8329,8 +8331,8 @@
         </p:nvSpPr>
         <p:spPr>
           <a:xfrm>
-            <a:off x="6163056" y="1828800"/>
-            <a:ext cx="2665476" cy="1051560"/>
+            <a:off x="3877056" y="1828800"/>
+            <a:ext cx="1522476" cy="1051560"/>
           </a:xfrm>
           <a:prstGeom prst="roundRect">
             <a:avLst>
@@ -8374,7 +8376,7 @@
         </p:nvSpPr>
         <p:spPr>
           <a:xfrm>
-            <a:off x="6291072" y="1993392"/>
+            <a:off x="4005072" y="1993392"/>
             <a:ext cx="292608" cy="292608"/>
           </a:xfrm>
           <a:prstGeom prst="ellipse">
@@ -8417,7 +8419,7 @@
         </p:nvSpPr>
         <p:spPr>
           <a:xfrm>
-            <a:off x="6291072" y="2011680"/>
+            <a:off x="4005072" y="2011680"/>
             <a:ext cx="292608" cy="274320"/>
           </a:xfrm>
           <a:prstGeom prst="rect">
@@ -8452,8 +8454,8 @@
         </p:nvSpPr>
         <p:spPr>
           <a:xfrm>
-            <a:off x="6665976" y="1993392"/>
-            <a:ext cx="2025396" cy="292608"/>
+            <a:off x="4379976" y="1993392"/>
+            <a:ext cx="882396" cy="292608"/>
           </a:xfrm>
           <a:prstGeom prst="rect">
             <a:avLst/>
@@ -8474,7 +8476,7 @@
                 </a:solidFill>
                 <a:latin typeface="Calibri"/>
               </a:rPr>
-              <a:t>Rozet</a:t>
+              <a:t>Topla</a:t>
             </a:r>
           </a:p>
         </p:txBody>
@@ -8487,8 +8489,8 @@
         </p:nvSpPr>
         <p:spPr>
           <a:xfrm>
-            <a:off x="6665976" y="2331720"/>
-            <a:ext cx="2025396" cy="411480"/>
+            <a:off x="4379976" y="2331720"/>
+            <a:ext cx="882396" cy="411480"/>
           </a:xfrm>
           <a:prstGeom prst="rect">
             <a:avLst/>
@@ -8509,7 +8511,7 @@
                 </a:solidFill>
                 <a:latin typeface="Calibri"/>
               </a:rPr>
-              <a:t>Resmi hesap kimliği</a:t>
+              <a:t>Başvuru + kota</a:t>
             </a:r>
           </a:p>
         </p:txBody>
@@ -8522,7 +8524,7 @@
         </p:nvCxnSpPr>
         <p:spPr>
           <a:xfrm>
-            <a:off x="8828532.0" y="2354580.0"/>
+            <a:off x="5399532.0" y="2354580.0"/>
             <a:ext cx="164592.0" cy="0.0"/>
           </a:xfrm>
           <a:prstGeom prst="line">
@@ -8557,8 +8559,8 @@
         </p:nvSpPr>
         <p:spPr>
           <a:xfrm>
-            <a:off x="8993124" y="1828800"/>
-            <a:ext cx="2665476" cy="1051560"/>
+            <a:off x="5564124" y="1828800"/>
+            <a:ext cx="1522476" cy="1051560"/>
           </a:xfrm>
           <a:prstGeom prst="roundRect">
             <a:avLst>
@@ -8602,7 +8604,7 @@
         </p:nvSpPr>
         <p:spPr>
           <a:xfrm>
-            <a:off x="9121140" y="1993392"/>
+            <a:off x="5692140" y="1993392"/>
             <a:ext cx="292608" cy="292608"/>
           </a:xfrm>
           <a:prstGeom prst="ellipse">
@@ -8645,7 +8647,7 @@
         </p:nvSpPr>
         <p:spPr>
           <a:xfrm>
-            <a:off x="9121140" y="2011680"/>
+            <a:off x="5692140" y="2011680"/>
             <a:ext cx="292608" cy="274320"/>
           </a:xfrm>
           <a:prstGeom prst="rect">
@@ -8680,8 +8682,8 @@
         </p:nvSpPr>
         <p:spPr>
           <a:xfrm>
-            <a:off x="9496044" y="1993392"/>
-            <a:ext cx="2025396" cy="292608"/>
+            <a:off x="6067044" y="1993392"/>
+            <a:ext cx="882396" cy="292608"/>
           </a:xfrm>
           <a:prstGeom prst="rect">
             <a:avLst/>
@@ -8702,7 +8704,7 @@
                 </a:solidFill>
                 <a:latin typeface="Calibri"/>
               </a:rPr>
-              <a:t>Yayın</a:t>
+              <a:t>Yönet</a:t>
             </a:r>
           </a:p>
         </p:txBody>
@@ -8715,8 +8717,8 @@
         </p:nvSpPr>
         <p:spPr>
           <a:xfrm>
-            <a:off x="9496044" y="2331720"/>
-            <a:ext cx="2025396" cy="411480"/>
+            <a:off x="6067044" y="2331720"/>
+            <a:ext cx="882396" cy="411480"/>
           </a:xfrm>
           <a:prstGeom prst="rect">
             <a:avLst/>
@@ -8737,55 +8739,43 @@
                 </a:solidFill>
                 <a:latin typeface="Calibri"/>
               </a:rPr>
-              <a:t>İlk etkinlik ve duyuru</a:t>
-            </a:r>
-          </a:p>
-        </p:txBody>
-      </p:sp>
-      <p:sp>
-        <p:nvSpPr>
-          <p:cNvPr id="32" name="Rounded Rectangle 31"/>
-          <p:cNvSpPr/>
-          <p:nvPr/>
-        </p:nvSpPr>
-        <p:spPr>
-          <a:xfrm>
-            <a:off x="822960" y="3474720"/>
-            <a:ext cx="10561320" cy="1371600"/>
-          </a:xfrm>
-          <a:prstGeom prst="roundRect">
-            <a:avLst>
-              <a:gd name="adj" fmla="val 12000"/>
-            </a:avLst>
-          </a:prstGeom>
-          <a:solidFill>
-            <a:srgbClr val="EEF5F8"/>
-          </a:solidFill>
-          <a:ln w="12700">
-            <a:solidFill>
-              <a:srgbClr val="1FA6A0"/>
-            </a:solidFill>
-          </a:ln>
-        </p:spPr>
-        <p:style>
-          <a:lnRef idx="1">
-            <a:schemeClr val="accent1"/>
-          </a:lnRef>
-          <a:fillRef idx="3">
-            <a:schemeClr val="accent1"/>
-          </a:fillRef>
-          <a:effectRef idx="2">
-            <a:schemeClr val="accent1"/>
-          </a:effectRef>
-          <a:fontRef idx="minor">
-            <a:schemeClr val="lt1"/>
-          </a:fontRef>
-        </p:style>
-        <p:txBody>
-          <a:bodyPr rtlCol="0" anchor="ctr"/>
-          <a:lstStyle/>
-          <a:p>
-            <a:pPr algn="ctr"/>
+              <a:t>Katılım takibi</a:t>
+            </a:r>
+          </a:p>
+        </p:txBody>
+      </p:sp>
+      <p:sp>
+        <p:nvSpPr>
+          <p:cNvPr id="32" name="TextBox 31"/>
+          <p:cNvSpPr txBox="1"/>
+          <p:nvPr/>
+        </p:nvSpPr>
+        <p:spPr>
+          <a:xfrm>
+            <a:off x="502920" y="3246120"/>
+            <a:ext cx="6492240" cy="365760"/>
+          </a:xfrm>
+          <a:prstGeom prst="rect">
+            <a:avLst/>
+          </a:prstGeom>
+          <a:noFill/>
+        </p:spPr>
+        <p:txBody>
+          <a:bodyPr wrap="square">
+            <a:spAutoFit/>
+          </a:bodyPr>
+          <a:lstStyle/>
+          <a:p>
+            <a:pPr algn="l"/>
+            <a:r>
+              <a:rPr sz="1600" b="1">
+                <a:solidFill>
+                  <a:srgbClr val="0B1F33"/>
+                </a:solidFill>
+                <a:latin typeface="Calibri"/>
+              </a:rPr>
+              <a:t>Topluluk için kazanım</a:t>
+            </a:r>
           </a:p>
         </p:txBody>
       </p:sp>
@@ -8797,68 +8787,109 @@
         </p:nvSpPr>
         <p:spPr>
           <a:xfrm>
-            <a:off x="1097280" y="3749039"/>
-            <a:ext cx="10012680" cy="347472"/>
-          </a:xfrm>
-          <a:prstGeom prst="rect">
-            <a:avLst/>
-          </a:prstGeom>
-          <a:noFill/>
-        </p:spPr>
-        <p:txBody>
-          <a:bodyPr wrap="square">
-            <a:spAutoFit/>
-          </a:bodyPr>
-          <a:lstStyle/>
-          <a:p>
-            <a:pPr algn="ctr"/>
-            <a:r>
-              <a:rPr sz="1800" b="1">
-                <a:solidFill>
-                  <a:srgbClr val="0B1F33"/>
-                </a:solidFill>
-                <a:latin typeface="Calibri"/>
-              </a:rPr>
-              <a:t>Doğrulanmış topluluk hesabı</a:t>
-            </a:r>
-          </a:p>
-        </p:txBody>
-      </p:sp>
-      <p:sp>
-        <p:nvSpPr>
-          <p:cNvPr id="34" name="TextBox 33"/>
-          <p:cNvSpPr txBox="1"/>
-          <p:nvPr/>
-        </p:nvSpPr>
-        <p:spPr>
-          <a:xfrm>
-            <a:off x="1097280" y="4160520"/>
-            <a:ext cx="10012680" cy="457200"/>
-          </a:xfrm>
-          <a:prstGeom prst="rect">
-            <a:avLst/>
-          </a:prstGeom>
-          <a:noFill/>
-        </p:spPr>
-        <p:txBody>
-          <a:bodyPr wrap="square">
-            <a:spAutoFit/>
-          </a:bodyPr>
-          <a:lstStyle/>
-          <a:p>
-            <a:pPr algn="ctr"/>
-            <a:r>
-              <a:rPr sz="1400" b="0">
-                <a:solidFill>
-                  <a:srgbClr val="5A6A7A"/>
-                </a:solidFill>
-                <a:latin typeface="Calibri"/>
-              </a:rPr>
-              <a:t>Duyuru yetkisi · Etkinlik kartı · Topluluk profili · Güvenli moderasyon</a:t>
-            </a:r>
-          </a:p>
-        </p:txBody>
-      </p:sp>
+            <a:off x="502920" y="3657600"/>
+            <a:ext cx="6400800" cy="3200400"/>
+          </a:xfrm>
+          <a:prstGeom prst="rect">
+            <a:avLst/>
+          </a:prstGeom>
+          <a:noFill/>
+        </p:spPr>
+        <p:txBody>
+          <a:bodyPr wrap="square">
+            <a:spAutoFit/>
+          </a:bodyPr>
+          <a:lstStyle/>
+          <a:p>
+            <a:pPr>
+              <a:spcAft>
+                <a:spcPts val="800"/>
+              </a:spcAft>
+            </a:pPr>
+            <a:r>
+              <a:rPr sz="1300" b="0">
+                <a:solidFill>
+                  <a:srgbClr val="1A2B3A"/>
+                </a:solidFill>
+                <a:latin typeface="Calibri"/>
+              </a:rPr>
+              <a:t>•  Dağınık form ve mesaj trafiği azalır</a:t>
+            </a:r>
+          </a:p>
+          <a:p>
+            <a:pPr>
+              <a:spcAft>
+                <a:spcPts val="800"/>
+              </a:spcAft>
+            </a:pPr>
+            <a:r>
+              <a:rPr sz="1300" b="0">
+                <a:solidFill>
+                  <a:srgbClr val="1A2B3A"/>
+                </a:solidFill>
+                <a:latin typeface="Calibri"/>
+              </a:rPr>
+              <a:t>•  Kontenjan ve son başvuru net görünür</a:t>
+            </a:r>
+          </a:p>
+          <a:p>
+            <a:pPr>
+              <a:spcAft>
+                <a:spcPts val="800"/>
+              </a:spcAft>
+            </a:pPr>
+            <a:r>
+              <a:rPr sz="1300" b="0">
+                <a:solidFill>
+                  <a:srgbClr val="1A2B3A"/>
+                </a:solidFill>
+                <a:latin typeface="Calibri"/>
+              </a:rPr>
+              <a:t>•  Üyeler duyuruyu kampüs akışında keşfeder</a:t>
+            </a:r>
+          </a:p>
+          <a:p>
+            <a:pPr>
+              <a:spcAft>
+                <a:spcPts val="800"/>
+              </a:spcAft>
+            </a:pPr>
+            <a:r>
+              <a:rPr sz="1300" b="0">
+                <a:solidFill>
+                  <a:srgbClr val="1A2B3A"/>
+                </a:solidFill>
+                <a:latin typeface="Calibri"/>
+              </a:rPr>
+              <a:t>•  App Link ile etkinlik linki uygulama yoksa mağazaya düşer</a:t>
+            </a:r>
+          </a:p>
+        </p:txBody>
+      </p:sp>
+      <p:pic>
+        <p:nvPicPr>
+          <p:cNvPr id="34" name="Picture 33" descr="06_events.png"/>
+          <p:cNvPicPr>
+            <a:picLocks noChangeAspect="1"/>
+          </p:cNvPicPr>
+          <p:nvPr/>
+        </p:nvPicPr>
+        <p:blipFill>
+          <a:blip r:embed="rId3"/>
+          <a:stretch>
+            <a:fillRect/>
+          </a:stretch>
+        </p:blipFill>
+        <p:spPr>
+          <a:xfrm>
+            <a:off x="8679433" y="1508760"/>
+            <a:ext cx="2072133" cy="4663440"/>
+          </a:xfrm>
+          <a:prstGeom prst="rect">
+            <a:avLst/>
+          </a:prstGeom>
+        </p:spPr>
+      </p:pic>
       <p:sp>
         <p:nvSpPr>
           <p:cNvPr id="35" name="Rectangle 34"/>
@@ -8967,7 +8998,7 @@
                 </a:solidFill>
                 <a:latin typeface="Calibri"/>
               </a:rPr>
-              <a:t>5 / 7</a:t>
+              <a:t>5 / 9</a:t>
             </a:r>
           </a:p>
         </p:txBody>
@@ -9157,7 +9188,7 @@
                 </a:solidFill>
                 <a:latin typeface="Calibri"/>
               </a:rPr>
-              <a:t>STAND QR'LARI</a:t>
+              <a:t>ELÇİLİK &amp; AİDİYET</a:t>
             </a:r>
           </a:p>
         </p:txBody>
@@ -9192,7 +9223,7 @@
                 </a:solidFill>
                 <a:latin typeface="Calibri"/>
               </a:rPr>
-              <a:t>Okut, indir ve takip et</a:t>
+              <a:t>Kampüs elçileri ve bağlı hesaplar</a:t>
             </a:r>
           </a:p>
         </p:txBody>
@@ -9248,8 +9279,8 @@
         </p:nvSpPr>
         <p:spPr>
           <a:xfrm>
-            <a:off x="1856232" y="1490472"/>
-            <a:ext cx="2642616" cy="3410712"/>
+            <a:off x="640080" y="1691640"/>
+            <a:ext cx="5367528" cy="1984248"/>
           </a:xfrm>
           <a:prstGeom prst="roundRect">
             <a:avLst>
@@ -9257,12 +9288,10 @@
             </a:avLst>
           </a:prstGeom>
           <a:solidFill>
-            <a:srgbClr val="FFFFFF"/>
+            <a:srgbClr val="0B1F33"/>
           </a:solidFill>
-          <a:ln w="12700">
-            <a:solidFill>
-              <a:srgbClr val="C9D8E2"/>
-            </a:solidFill>
+          <a:ln>
+            <a:noFill/>
           </a:ln>
         </p:spPr>
         <p:style>
@@ -9287,32 +9316,41 @@
           </a:p>
         </p:txBody>
       </p:sp>
-      <p:pic>
-        <p:nvPicPr>
-          <p:cNvPr id="10" name="Picture 9" descr="qr_kampusteyim_indir.png">
-            <a:hlinkClick r:id="rId4"/>
-          </p:cNvPr>
-          <p:cNvPicPr>
-            <a:picLocks noChangeAspect="1"/>
-          </p:cNvPicPr>
-          <p:nvPr/>
-        </p:nvPicPr>
-        <p:blipFill>
-          <a:blip r:embed="rId3"/>
-          <a:stretch>
-            <a:fillRect/>
-          </a:stretch>
-        </p:blipFill>
-        <p:spPr>
-          <a:xfrm>
-            <a:off x="1965960" y="1600200"/>
-            <a:ext cx="2423160" cy="2423160"/>
-          </a:xfrm>
-          <a:prstGeom prst="rect">
-            <a:avLst/>
-          </a:prstGeom>
-        </p:spPr>
-      </p:pic>
+      <p:sp>
+        <p:nvSpPr>
+          <p:cNvPr id="10" name="TextBox 9"/>
+          <p:cNvSpPr txBox="1"/>
+          <p:nvPr/>
+        </p:nvSpPr>
+        <p:spPr>
+          <a:xfrm>
+            <a:off x="841248" y="1874520"/>
+            <a:ext cx="5001768" cy="320040"/>
+          </a:xfrm>
+          <a:prstGeom prst="rect">
+            <a:avLst/>
+          </a:prstGeom>
+          <a:noFill/>
+        </p:spPr>
+        <p:txBody>
+          <a:bodyPr wrap="square">
+            <a:spAutoFit/>
+          </a:bodyPr>
+          <a:lstStyle/>
+          <a:p>
+            <a:pPr algn="l"/>
+            <a:r>
+              <a:rPr sz="1500" b="1">
+                <a:solidFill>
+                  <a:srgbClr val="2EC4B6"/>
+                </a:solidFill>
+                <a:latin typeface="Calibri"/>
+              </a:rPr>
+              <a:t>Kampüs elçisi</a:t>
+            </a:r>
+          </a:p>
+        </p:txBody>
+      </p:sp>
       <p:sp>
         <p:nvSpPr>
           <p:cNvPr id="11" name="TextBox 10"/>
@@ -9321,78 +9359,43 @@
         </p:nvSpPr>
         <p:spPr>
           <a:xfrm>
-            <a:off x="1920240" y="4133088"/>
-            <a:ext cx="2514600" cy="274320"/>
-          </a:xfrm>
-          <a:prstGeom prst="rect">
-            <a:avLst/>
-          </a:prstGeom>
-          <a:noFill/>
-        </p:spPr>
-        <p:txBody>
-          <a:bodyPr wrap="square">
-            <a:spAutoFit/>
-          </a:bodyPr>
-          <a:lstStyle/>
-          <a:p>
-            <a:pPr algn="ctr"/>
-            <a:r>
-              <a:rPr sz="1400" b="1">
-                <a:solidFill>
-                  <a:srgbClr val="0B1F33"/>
-                </a:solidFill>
-                <a:latin typeface="Calibri"/>
-              </a:rPr>
-              <a:t>KampüsteyimAPP’i aç</a:t>
-            </a:r>
-          </a:p>
-        </p:txBody>
-      </p:sp>
-      <p:sp>
-        <p:nvSpPr>
-          <p:cNvPr id="12" name="TextBox 11"/>
-          <p:cNvSpPr txBox="1"/>
-          <p:nvPr/>
-        </p:nvSpPr>
-        <p:spPr>
-          <a:xfrm>
-            <a:off x="1920240" y="4416552"/>
-            <a:ext cx="2514600" cy="347472"/>
-          </a:xfrm>
-          <a:prstGeom prst="rect">
-            <a:avLst/>
-          </a:prstGeom>
-          <a:noFill/>
-        </p:spPr>
-        <p:txBody>
-          <a:bodyPr wrap="square">
-            <a:spAutoFit/>
-          </a:bodyPr>
-          <a:lstStyle/>
-          <a:p>
-            <a:pPr algn="ctr"/>
-            <a:r>
-              <a:rPr sz="1000" b="0">
-                <a:solidFill>
-                  <a:srgbClr val="5A6A7A"/>
-                </a:solidFill>
-                <a:latin typeface="Calibri"/>
-              </a:rPr>
-              <a:t>iOS / Android akıllı yönlendirme</a:t>
-            </a:r>
-          </a:p>
-        </p:txBody>
-      </p:sp>
-      <p:sp>
-        <p:nvSpPr>
-          <p:cNvPr id="13" name="Rounded Rectangle 12"/>
+            <a:off x="841248" y="2194560"/>
+            <a:ext cx="5001768" cy="1344168"/>
+          </a:xfrm>
+          <a:prstGeom prst="rect">
+            <a:avLst/>
+          </a:prstGeom>
+          <a:noFill/>
+        </p:spPr>
+        <p:txBody>
+          <a:bodyPr wrap="square">
+            <a:spAutoFit/>
+          </a:bodyPr>
+          <a:lstStyle/>
+          <a:p>
+            <a:pPr algn="l"/>
+            <a:r>
+              <a:rPr sz="1200" b="0">
+                <a:solidFill>
+                  <a:srgbClr val="C9DBE8"/>
+                </a:solidFill>
+                <a:latin typeface="Calibri"/>
+              </a:rPr>
+              <a:t>Topluluğu temsil eden öğrencilere özel rozet ve görünürlük.</a:t>
+            </a:r>
+          </a:p>
+        </p:txBody>
+      </p:sp>
+      <p:sp>
+        <p:nvSpPr>
+          <p:cNvPr id="12" name="Rounded Rectangle 11"/>
           <p:cNvSpPr/>
           <p:nvPr/>
         </p:nvSpPr>
         <p:spPr>
           <a:xfrm>
-            <a:off x="7662672" y="1490472"/>
-            <a:ext cx="2642616" cy="3410712"/>
+            <a:off x="6153912" y="1691640"/>
+            <a:ext cx="5367528" cy="1984248"/>
           </a:xfrm>
           <a:prstGeom prst="roundRect">
             <a:avLst>
@@ -9400,12 +9403,10 @@
             </a:avLst>
           </a:prstGeom>
           <a:solidFill>
-            <a:srgbClr val="FFFFFF"/>
+            <a:srgbClr val="12324A"/>
           </a:solidFill>
-          <a:ln w="12700">
-            <a:solidFill>
-              <a:srgbClr val="C9D8E2"/>
-            </a:solidFill>
+          <a:ln>
+            <a:noFill/>
           </a:ln>
         </p:spPr>
         <p:style>
@@ -9430,64 +9431,118 @@
           </a:p>
         </p:txBody>
       </p:sp>
-      <p:pic>
-        <p:nvPicPr>
-          <p:cNvPr id="14" name="Picture 13" descr="qr_kampusteyim_instagram.png">
-            <a:hlinkClick r:id="rId6"/>
-          </p:cNvPr>
-          <p:cNvPicPr>
-            <a:picLocks noChangeAspect="1"/>
-          </p:cNvPicPr>
-          <p:nvPr/>
-        </p:nvPicPr>
-        <p:blipFill>
-          <a:blip r:embed="rId5"/>
-          <a:stretch>
-            <a:fillRect/>
-          </a:stretch>
-        </p:blipFill>
-        <p:spPr>
-          <a:xfrm>
-            <a:off x="7772400" y="1600200"/>
-            <a:ext cx="2423160" cy="2423160"/>
-          </a:xfrm>
-          <a:prstGeom prst="rect">
-            <a:avLst/>
-          </a:prstGeom>
-        </p:spPr>
-      </p:pic>
-      <p:sp>
-        <p:nvSpPr>
-          <p:cNvPr id="15" name="TextBox 14"/>
-          <p:cNvSpPr txBox="1"/>
-          <p:nvPr/>
-        </p:nvSpPr>
-        <p:spPr>
-          <a:xfrm>
-            <a:off x="7726680" y="4133088"/>
-            <a:ext cx="2514600" cy="274320"/>
-          </a:xfrm>
-          <a:prstGeom prst="rect">
-            <a:avLst/>
-          </a:prstGeom>
-          <a:noFill/>
-        </p:spPr>
-        <p:txBody>
-          <a:bodyPr wrap="square">
-            <a:spAutoFit/>
-          </a:bodyPr>
+      <p:sp>
+        <p:nvSpPr>
+          <p:cNvPr id="13" name="TextBox 12"/>
+          <p:cNvSpPr txBox="1"/>
+          <p:nvPr/>
+        </p:nvSpPr>
+        <p:spPr>
+          <a:xfrm>
+            <a:off x="6355080" y="1874520"/>
+            <a:ext cx="5001768" cy="320040"/>
+          </a:xfrm>
+          <a:prstGeom prst="rect">
+            <a:avLst/>
+          </a:prstGeom>
+          <a:noFill/>
+        </p:spPr>
+        <p:txBody>
+          <a:bodyPr wrap="square">
+            <a:spAutoFit/>
+          </a:bodyPr>
+          <a:lstStyle/>
+          <a:p>
+            <a:pPr algn="l"/>
+            <a:r>
+              <a:rPr sz="1500" b="1">
+                <a:solidFill>
+                  <a:srgbClr val="2EC4B6"/>
+                </a:solidFill>
+                <a:latin typeface="Calibri"/>
+              </a:rPr>
+              <a:t>Bağlı hesaplar</a:t>
+            </a:r>
+          </a:p>
+        </p:txBody>
+      </p:sp>
+      <p:sp>
+        <p:nvSpPr>
+          <p:cNvPr id="14" name="TextBox 13"/>
+          <p:cNvSpPr txBox="1"/>
+          <p:nvPr/>
+        </p:nvSpPr>
+        <p:spPr>
+          <a:xfrm>
+            <a:off x="6355080" y="2194560"/>
+            <a:ext cx="5001768" cy="1344168"/>
+          </a:xfrm>
+          <a:prstGeom prst="rect">
+            <a:avLst/>
+          </a:prstGeom>
+          <a:noFill/>
+        </p:spPr>
+        <p:txBody>
+          <a:bodyPr wrap="square">
+            <a:spAutoFit/>
+          </a:bodyPr>
+          <a:lstStyle/>
+          <a:p>
+            <a:pPr algn="l"/>
+            <a:r>
+              <a:rPr sz="1200" b="0">
+                <a:solidFill>
+                  <a:srgbClr val="C9DBE8"/>
+                </a:solidFill>
+                <a:latin typeface="Calibri"/>
+              </a:rPr>
+              <a:t>Öğrenci profilinde topluluk / firma aidiyeti gösterimi.</a:t>
+            </a:r>
+          </a:p>
+        </p:txBody>
+      </p:sp>
+      <p:sp>
+        <p:nvSpPr>
+          <p:cNvPr id="15" name="Rounded Rectangle 14"/>
+          <p:cNvSpPr/>
+          <p:nvPr/>
+        </p:nvSpPr>
+        <p:spPr>
+          <a:xfrm>
+            <a:off x="640080" y="3822192"/>
+            <a:ext cx="5367528" cy="1984248"/>
+          </a:xfrm>
+          <a:prstGeom prst="roundRect">
+            <a:avLst>
+              <a:gd name="adj" fmla="val 12000"/>
+            </a:avLst>
+          </a:prstGeom>
+          <a:solidFill>
+            <a:srgbClr val="0F3A3A"/>
+          </a:solidFill>
+          <a:ln>
+            <a:noFill/>
+          </a:ln>
+        </p:spPr>
+        <p:style>
+          <a:lnRef idx="1">
+            <a:schemeClr val="accent1"/>
+          </a:lnRef>
+          <a:fillRef idx="3">
+            <a:schemeClr val="accent1"/>
+          </a:fillRef>
+          <a:effectRef idx="2">
+            <a:schemeClr val="accent1"/>
+          </a:effectRef>
+          <a:fontRef idx="minor">
+            <a:schemeClr val="lt1"/>
+          </a:fontRef>
+        </p:style>
+        <p:txBody>
+          <a:bodyPr rtlCol="0" anchor="ctr"/>
           <a:lstStyle/>
           <a:p>
             <a:pPr algn="ctr"/>
-            <a:r>
-              <a:rPr sz="1400" b="1">
-                <a:solidFill>
-                  <a:srgbClr val="0B1F33"/>
-                </a:solidFill>
-                <a:latin typeface="Calibri"/>
-              </a:rPr>
-              <a:t>Hesabımızı takip et</a:t>
-            </a:r>
           </a:p>
         </p:txBody>
       </p:sp>
@@ -9499,71 +9554,186 @@
         </p:nvSpPr>
         <p:spPr>
           <a:xfrm>
-            <a:off x="7726680" y="4416552"/>
-            <a:ext cx="2514600" cy="347472"/>
-          </a:xfrm>
-          <a:prstGeom prst="rect">
-            <a:avLst/>
-          </a:prstGeom>
-          <a:noFill/>
-        </p:spPr>
-        <p:txBody>
-          <a:bodyPr wrap="square">
-            <a:spAutoFit/>
-          </a:bodyPr>
+            <a:off x="841248" y="4005072"/>
+            <a:ext cx="5001768" cy="320040"/>
+          </a:xfrm>
+          <a:prstGeom prst="rect">
+            <a:avLst/>
+          </a:prstGeom>
+          <a:noFill/>
+        </p:spPr>
+        <p:txBody>
+          <a:bodyPr wrap="square">
+            <a:spAutoFit/>
+          </a:bodyPr>
+          <a:lstStyle/>
+          <a:p>
+            <a:pPr algn="l"/>
+            <a:r>
+              <a:rPr sz="1500" b="1">
+                <a:solidFill>
+                  <a:srgbClr val="2EC4B6"/>
+                </a:solidFill>
+                <a:latin typeface="Calibri"/>
+              </a:rPr>
+              <a:t>Takip &amp; gizlilik</a:t>
+            </a:r>
+          </a:p>
+        </p:txBody>
+      </p:sp>
+      <p:sp>
+        <p:nvSpPr>
+          <p:cNvPr id="17" name="TextBox 16"/>
+          <p:cNvSpPr txBox="1"/>
+          <p:nvPr/>
+        </p:nvSpPr>
+        <p:spPr>
+          <a:xfrm>
+            <a:off x="841248" y="4325112"/>
+            <a:ext cx="5001768" cy="1344168"/>
+          </a:xfrm>
+          <a:prstGeom prst="rect">
+            <a:avLst/>
+          </a:prstGeom>
+          <a:noFill/>
+        </p:spPr>
+        <p:txBody>
+          <a:bodyPr wrap="square">
+            <a:spAutoFit/>
+          </a:bodyPr>
+          <a:lstStyle/>
+          <a:p>
+            <a:pPr algn="l"/>
+            <a:r>
+              <a:rPr sz="1200" b="0">
+                <a:solidFill>
+                  <a:srgbClr val="C9DBE8"/>
+                </a:solidFill>
+                <a:latin typeface="Calibri"/>
+              </a:rPr>
+              <a:t>Gizli hesap ve takip isteği ile üye yönetimini netleştirin.</a:t>
+            </a:r>
+          </a:p>
+        </p:txBody>
+      </p:sp>
+      <p:sp>
+        <p:nvSpPr>
+          <p:cNvPr id="18" name="Rounded Rectangle 17"/>
+          <p:cNvSpPr/>
+          <p:nvPr/>
+        </p:nvSpPr>
+        <p:spPr>
+          <a:xfrm>
+            <a:off x="6153912" y="3822192"/>
+            <a:ext cx="5367528" cy="1984248"/>
+          </a:xfrm>
+          <a:prstGeom prst="roundRect">
+            <a:avLst>
+              <a:gd name="adj" fmla="val 12000"/>
+            </a:avLst>
+          </a:prstGeom>
+          <a:solidFill>
+            <a:srgbClr val="1A3348"/>
+          </a:solidFill>
+          <a:ln>
+            <a:noFill/>
+          </a:ln>
+        </p:spPr>
+        <p:style>
+          <a:lnRef idx="1">
+            <a:schemeClr val="accent1"/>
+          </a:lnRef>
+          <a:fillRef idx="3">
+            <a:schemeClr val="accent1"/>
+          </a:fillRef>
+          <a:effectRef idx="2">
+            <a:schemeClr val="accent1"/>
+          </a:effectRef>
+          <a:fontRef idx="minor">
+            <a:schemeClr val="lt1"/>
+          </a:fontRef>
+        </p:style>
+        <p:txBody>
+          <a:bodyPr rtlCol="0" anchor="ctr"/>
           <a:lstStyle/>
           <a:p>
             <a:pPr algn="ctr"/>
-            <a:r>
-              <a:rPr sz="1000" b="0">
-                <a:solidFill>
-                  <a:srgbClr val="5A6A7A"/>
-                </a:solidFill>
-                <a:latin typeface="Calibri"/>
-              </a:rPr>
-              <a:t>@kampusteyimapp</a:t>
-            </a:r>
-          </a:p>
-        </p:txBody>
-      </p:sp>
-      <p:sp>
-        <p:nvSpPr>
-          <p:cNvPr id="17" name="TextBox 16"/>
-          <p:cNvSpPr txBox="1"/>
-          <p:nvPr/>
-        </p:nvSpPr>
-        <p:spPr>
-          <a:xfrm>
-            <a:off x="1005840" y="5257800"/>
-            <a:ext cx="10149840" cy="438912"/>
-          </a:xfrm>
-          <a:prstGeom prst="rect">
-            <a:avLst/>
-          </a:prstGeom>
-          <a:noFill/>
-        </p:spPr>
-        <p:txBody>
-          <a:bodyPr wrap="square">
-            <a:spAutoFit/>
-          </a:bodyPr>
-          <a:lstStyle/>
-          <a:p>
-            <a:pPr algn="ctr"/>
-            <a:r>
-              <a:rPr sz="1700" b="1">
-                <a:solidFill>
-                  <a:srgbClr val="1FA6A0"/>
-                </a:solidFill>
-                <a:latin typeface="Calibri"/>
-              </a:rPr>
-              <a:t>Standda göster · Çıktı al · Öğrenciyi tek adımda yönlendir</a:t>
-            </a:r>
-          </a:p>
-        </p:txBody>
-      </p:sp>
-      <p:sp>
-        <p:nvSpPr>
-          <p:cNvPr id="18" name="Rectangle 17"/>
+          </a:p>
+        </p:txBody>
+      </p:sp>
+      <p:sp>
+        <p:nvSpPr>
+          <p:cNvPr id="19" name="TextBox 18"/>
+          <p:cNvSpPr txBox="1"/>
+          <p:nvPr/>
+        </p:nvSpPr>
+        <p:spPr>
+          <a:xfrm>
+            <a:off x="6355080" y="4005072"/>
+            <a:ext cx="5001768" cy="320040"/>
+          </a:xfrm>
+          <a:prstGeom prst="rect">
+            <a:avLst/>
+          </a:prstGeom>
+          <a:noFill/>
+        </p:spPr>
+        <p:txBody>
+          <a:bodyPr wrap="square">
+            <a:spAutoFit/>
+          </a:bodyPr>
+          <a:lstStyle/>
+          <a:p>
+            <a:pPr algn="l"/>
+            <a:r>
+              <a:rPr sz="1500" b="1">
+                <a:solidFill>
+                  <a:srgbClr val="2EC4B6"/>
+                </a:solidFill>
+                <a:latin typeface="Calibri"/>
+              </a:rPr>
+              <a:t>İş ortakları</a:t>
+            </a:r>
+          </a:p>
+        </p:txBody>
+      </p:sp>
+      <p:sp>
+        <p:nvSpPr>
+          <p:cNvPr id="20" name="TextBox 19"/>
+          <p:cNvSpPr txBox="1"/>
+          <p:nvPr/>
+        </p:nvSpPr>
+        <p:spPr>
+          <a:xfrm>
+            <a:off x="6355080" y="4325112"/>
+            <a:ext cx="5001768" cy="1344168"/>
+          </a:xfrm>
+          <a:prstGeom prst="rect">
+            <a:avLst/>
+          </a:prstGeom>
+          <a:noFill/>
+        </p:spPr>
+        <p:txBody>
+          <a:bodyPr wrap="square">
+            <a:spAutoFit/>
+          </a:bodyPr>
+          <a:lstStyle/>
+          <a:p>
+            <a:pPr algn="l"/>
+            <a:r>
+              <a:rPr sz="1200" b="0">
+                <a:solidFill>
+                  <a:srgbClr val="C9DBE8"/>
+                </a:solidFill>
+                <a:latin typeface="Calibri"/>
+              </a:rPr>
+              <a:t>About bölümünde partner vitrini — sponsor görünürlüğü.</a:t>
+            </a:r>
+          </a:p>
+        </p:txBody>
+      </p:sp>
+      <p:sp>
+        <p:nvSpPr>
+          <p:cNvPr id="21" name="Rectangle 20"/>
           <p:cNvSpPr/>
           <p:nvPr/>
         </p:nvSpPr>
@@ -9606,7 +9776,7 @@
       </p:sp>
       <p:sp>
         <p:nvSpPr>
-          <p:cNvPr id="19" name="TextBox 18"/>
+          <p:cNvPr id="22" name="TextBox 21"/>
           <p:cNvSpPr txBox="1"/>
           <p:nvPr/>
         </p:nvSpPr>
@@ -9641,7 +9811,7 @@
       </p:sp>
       <p:sp>
         <p:nvSpPr>
-          <p:cNvPr id="20" name="TextBox 19"/>
+          <p:cNvPr id="23" name="TextBox 22"/>
           <p:cNvSpPr txBox="1"/>
           <p:nvPr/>
         </p:nvSpPr>
@@ -9669,7 +9839,7 @@
                 </a:solidFill>
                 <a:latin typeface="Calibri"/>
               </a:rPr>
-              <a:t>6 / 7</a:t>
+              <a:t>6 / 9</a:t>
             </a:r>
           </a:p>
         </p:txBody>
@@ -9859,7 +10029,7 @@
                 </a:solidFill>
                 <a:latin typeface="Calibri"/>
               </a:rPr>
-              <a:t>KAPANIŞ</a:t>
+              <a:t>RESMİ HESAP</a:t>
             </a:r>
           </a:p>
         </p:txBody>
@@ -9894,7 +10064,7 @@
                 </a:solidFill>
                 <a:latin typeface="Calibri"/>
               </a:rPr>
-              <a:t>Topluluğunuz kampüsün dijital akışında</a:t>
+              <a:t>Topluluk hesabınızı aktive edin</a:t>
             </a:r>
           </a:p>
         </p:txBody>
@@ -9950,13 +10120,1136 @@
         </p:nvSpPr>
         <p:spPr>
           <a:xfrm>
-            <a:off x="822960" y="1737360"/>
-            <a:ext cx="10561320" cy="2148840"/>
+            <a:off x="502920" y="1828800"/>
+            <a:ext cx="2665476" cy="1051560"/>
           </a:xfrm>
           <a:prstGeom prst="roundRect">
             <a:avLst>
               <a:gd name="adj" fmla="val 12000"/>
             </a:avLst>
+          </a:prstGeom>
+          <a:solidFill>
+            <a:srgbClr val="EEF5F8"/>
+          </a:solidFill>
+          <a:ln>
+            <a:noFill/>
+          </a:ln>
+        </p:spPr>
+        <p:style>
+          <a:lnRef idx="1">
+            <a:schemeClr val="accent1"/>
+          </a:lnRef>
+          <a:fillRef idx="3">
+            <a:schemeClr val="accent1"/>
+          </a:fillRef>
+          <a:effectRef idx="2">
+            <a:schemeClr val="accent1"/>
+          </a:effectRef>
+          <a:fontRef idx="minor">
+            <a:schemeClr val="lt1"/>
+          </a:fontRef>
+        </p:style>
+        <p:txBody>
+          <a:bodyPr rtlCol="0" anchor="ctr"/>
+          <a:lstStyle/>
+          <a:p>
+            <a:pPr algn="ctr"/>
+          </a:p>
+        </p:txBody>
+      </p:sp>
+      <p:sp>
+        <p:nvSpPr>
+          <p:cNvPr id="10" name="Oval 9"/>
+          <p:cNvSpPr/>
+          <p:nvPr/>
+        </p:nvSpPr>
+        <p:spPr>
+          <a:xfrm>
+            <a:off x="630936" y="1993392"/>
+            <a:ext cx="292608" cy="292608"/>
+          </a:xfrm>
+          <a:prstGeom prst="ellipse">
+            <a:avLst/>
+          </a:prstGeom>
+          <a:solidFill>
+            <a:srgbClr val="1FA6A0"/>
+          </a:solidFill>
+          <a:ln>
+            <a:noFill/>
+          </a:ln>
+        </p:spPr>
+        <p:style>
+          <a:lnRef idx="1">
+            <a:schemeClr val="accent1"/>
+          </a:lnRef>
+          <a:fillRef idx="3">
+            <a:schemeClr val="accent1"/>
+          </a:fillRef>
+          <a:effectRef idx="2">
+            <a:schemeClr val="accent1"/>
+          </a:effectRef>
+          <a:fontRef idx="minor">
+            <a:schemeClr val="lt1"/>
+          </a:fontRef>
+        </p:style>
+        <p:txBody>
+          <a:bodyPr rtlCol="0" anchor="ctr"/>
+          <a:lstStyle/>
+          <a:p>
+            <a:pPr algn="ctr"/>
+          </a:p>
+        </p:txBody>
+      </p:sp>
+      <p:sp>
+        <p:nvSpPr>
+          <p:cNvPr id="11" name="TextBox 10"/>
+          <p:cNvSpPr txBox="1"/>
+          <p:nvPr/>
+        </p:nvSpPr>
+        <p:spPr>
+          <a:xfrm>
+            <a:off x="630936" y="2011680"/>
+            <a:ext cx="292608" cy="274320"/>
+          </a:xfrm>
+          <a:prstGeom prst="rect">
+            <a:avLst/>
+          </a:prstGeom>
+          <a:noFill/>
+        </p:spPr>
+        <p:txBody>
+          <a:bodyPr wrap="square">
+            <a:spAutoFit/>
+          </a:bodyPr>
+          <a:lstStyle/>
+          <a:p>
+            <a:pPr algn="ctr"/>
+            <a:r>
+              <a:rPr sz="1200" b="1">
+                <a:solidFill>
+                  <a:srgbClr val="FFFFFF"/>
+                </a:solidFill>
+                <a:latin typeface="Calibri"/>
+              </a:rPr>
+              <a:t>1</a:t>
+            </a:r>
+          </a:p>
+        </p:txBody>
+      </p:sp>
+      <p:sp>
+        <p:nvSpPr>
+          <p:cNvPr id="12" name="TextBox 11"/>
+          <p:cNvSpPr txBox="1"/>
+          <p:nvPr/>
+        </p:nvSpPr>
+        <p:spPr>
+          <a:xfrm>
+            <a:off x="1005840" y="1993392"/>
+            <a:ext cx="2025396" cy="292608"/>
+          </a:xfrm>
+          <a:prstGeom prst="rect">
+            <a:avLst/>
+          </a:prstGeom>
+          <a:noFill/>
+        </p:spPr>
+        <p:txBody>
+          <a:bodyPr wrap="square">
+            <a:spAutoFit/>
+          </a:bodyPr>
+          <a:lstStyle/>
+          <a:p>
+            <a:pPr algn="l"/>
+            <a:r>
+              <a:rPr sz="1300" b="1">
+                <a:solidFill>
+                  <a:srgbClr val="0B1F33"/>
+                </a:solidFill>
+                <a:latin typeface="Calibri"/>
+              </a:rPr>
+              <a:t>Başvuru</a:t>
+            </a:r>
+          </a:p>
+        </p:txBody>
+      </p:sp>
+      <p:sp>
+        <p:nvSpPr>
+          <p:cNvPr id="13" name="TextBox 12"/>
+          <p:cNvSpPr txBox="1"/>
+          <p:nvPr/>
+        </p:nvSpPr>
+        <p:spPr>
+          <a:xfrm>
+            <a:off x="1005840" y="2331720"/>
+            <a:ext cx="2025396" cy="411480"/>
+          </a:xfrm>
+          <a:prstGeom prst="rect">
+            <a:avLst/>
+          </a:prstGeom>
+          <a:noFill/>
+        </p:spPr>
+        <p:txBody>
+          <a:bodyPr wrap="square">
+            <a:spAutoFit/>
+          </a:bodyPr>
+          <a:lstStyle/>
+          <a:p>
+            <a:pPr algn="l"/>
+            <a:r>
+              <a:rPr sz="1100" b="0">
+                <a:solidFill>
+                  <a:srgbClr val="5A6A7A"/>
+                </a:solidFill>
+                <a:latin typeface="Calibri"/>
+              </a:rPr>
+              <a:t>Topluluk adı ve yetkili</a:t>
+            </a:r>
+          </a:p>
+        </p:txBody>
+      </p:sp>
+      <p:cxnSp>
+        <p:nvCxnSpPr>
+          <p:cNvPr id="14" name="Connector 13"/>
+          <p:cNvCxnSpPr/>
+          <p:nvPr/>
+        </p:nvCxnSpPr>
+        <p:spPr>
+          <a:xfrm>
+            <a:off x="3168396.0" y="2354580.0"/>
+            <a:ext cx="164592.0" cy="0.0"/>
+          </a:xfrm>
+          <a:prstGeom prst="line">
+            <a:avLst/>
+          </a:prstGeom>
+          <a:ln w="25400">
+            <a:solidFill>
+              <a:srgbClr val="1FA6A0"/>
+            </a:solidFill>
+          </a:ln>
+        </p:spPr>
+        <p:style>
+          <a:lnRef idx="2">
+            <a:schemeClr val="accent1"/>
+          </a:lnRef>
+          <a:fillRef idx="0">
+            <a:schemeClr val="accent1"/>
+          </a:fillRef>
+          <a:effectRef idx="1">
+            <a:schemeClr val="accent1"/>
+          </a:effectRef>
+          <a:fontRef idx="minor">
+            <a:schemeClr val="tx1"/>
+          </a:fontRef>
+        </p:style>
+      </p:cxnSp>
+      <p:sp>
+        <p:nvSpPr>
+          <p:cNvPr id="15" name="Rounded Rectangle 14"/>
+          <p:cNvSpPr/>
+          <p:nvPr/>
+        </p:nvSpPr>
+        <p:spPr>
+          <a:xfrm>
+            <a:off x="3332988" y="1828800"/>
+            <a:ext cx="2665476" cy="1051560"/>
+          </a:xfrm>
+          <a:prstGeom prst="roundRect">
+            <a:avLst>
+              <a:gd name="adj" fmla="val 12000"/>
+            </a:avLst>
+          </a:prstGeom>
+          <a:solidFill>
+            <a:srgbClr val="E4F0F4"/>
+          </a:solidFill>
+          <a:ln>
+            <a:noFill/>
+          </a:ln>
+        </p:spPr>
+        <p:style>
+          <a:lnRef idx="1">
+            <a:schemeClr val="accent1"/>
+          </a:lnRef>
+          <a:fillRef idx="3">
+            <a:schemeClr val="accent1"/>
+          </a:fillRef>
+          <a:effectRef idx="2">
+            <a:schemeClr val="accent1"/>
+          </a:effectRef>
+          <a:fontRef idx="minor">
+            <a:schemeClr val="lt1"/>
+          </a:fontRef>
+        </p:style>
+        <p:txBody>
+          <a:bodyPr rtlCol="0" anchor="ctr"/>
+          <a:lstStyle/>
+          <a:p>
+            <a:pPr algn="ctr"/>
+          </a:p>
+        </p:txBody>
+      </p:sp>
+      <p:sp>
+        <p:nvSpPr>
+          <p:cNvPr id="16" name="Oval 15"/>
+          <p:cNvSpPr/>
+          <p:nvPr/>
+        </p:nvSpPr>
+        <p:spPr>
+          <a:xfrm>
+            <a:off x="3461004" y="1993392"/>
+            <a:ext cx="292608" cy="292608"/>
+          </a:xfrm>
+          <a:prstGeom prst="ellipse">
+            <a:avLst/>
+          </a:prstGeom>
+          <a:solidFill>
+            <a:srgbClr val="1FA6A0"/>
+          </a:solidFill>
+          <a:ln>
+            <a:noFill/>
+          </a:ln>
+        </p:spPr>
+        <p:style>
+          <a:lnRef idx="1">
+            <a:schemeClr val="accent1"/>
+          </a:lnRef>
+          <a:fillRef idx="3">
+            <a:schemeClr val="accent1"/>
+          </a:fillRef>
+          <a:effectRef idx="2">
+            <a:schemeClr val="accent1"/>
+          </a:effectRef>
+          <a:fontRef idx="minor">
+            <a:schemeClr val="lt1"/>
+          </a:fontRef>
+        </p:style>
+        <p:txBody>
+          <a:bodyPr rtlCol="0" anchor="ctr"/>
+          <a:lstStyle/>
+          <a:p>
+            <a:pPr algn="ctr"/>
+          </a:p>
+        </p:txBody>
+      </p:sp>
+      <p:sp>
+        <p:nvSpPr>
+          <p:cNvPr id="17" name="TextBox 16"/>
+          <p:cNvSpPr txBox="1"/>
+          <p:nvPr/>
+        </p:nvSpPr>
+        <p:spPr>
+          <a:xfrm>
+            <a:off x="3461004" y="2011680"/>
+            <a:ext cx="292608" cy="274320"/>
+          </a:xfrm>
+          <a:prstGeom prst="rect">
+            <a:avLst/>
+          </a:prstGeom>
+          <a:noFill/>
+        </p:spPr>
+        <p:txBody>
+          <a:bodyPr wrap="square">
+            <a:spAutoFit/>
+          </a:bodyPr>
+          <a:lstStyle/>
+          <a:p>
+            <a:pPr algn="ctr"/>
+            <a:r>
+              <a:rPr sz="1200" b="1">
+                <a:solidFill>
+                  <a:srgbClr val="FFFFFF"/>
+                </a:solidFill>
+                <a:latin typeface="Calibri"/>
+              </a:rPr>
+              <a:t>2</a:t>
+            </a:r>
+          </a:p>
+        </p:txBody>
+      </p:sp>
+      <p:sp>
+        <p:nvSpPr>
+          <p:cNvPr id="18" name="TextBox 17"/>
+          <p:cNvSpPr txBox="1"/>
+          <p:nvPr/>
+        </p:nvSpPr>
+        <p:spPr>
+          <a:xfrm>
+            <a:off x="3835908" y="1993392"/>
+            <a:ext cx="2025396" cy="292608"/>
+          </a:xfrm>
+          <a:prstGeom prst="rect">
+            <a:avLst/>
+          </a:prstGeom>
+          <a:noFill/>
+        </p:spPr>
+        <p:txBody>
+          <a:bodyPr wrap="square">
+            <a:spAutoFit/>
+          </a:bodyPr>
+          <a:lstStyle/>
+          <a:p>
+            <a:pPr algn="l"/>
+            <a:r>
+              <a:rPr sz="1300" b="1">
+                <a:solidFill>
+                  <a:srgbClr val="0B1F33"/>
+                </a:solidFill>
+                <a:latin typeface="Calibri"/>
+              </a:rPr>
+              <a:t>Doğrulama</a:t>
+            </a:r>
+          </a:p>
+        </p:txBody>
+      </p:sp>
+      <p:sp>
+        <p:nvSpPr>
+          <p:cNvPr id="19" name="TextBox 18"/>
+          <p:cNvSpPr txBox="1"/>
+          <p:nvPr/>
+        </p:nvSpPr>
+        <p:spPr>
+          <a:xfrm>
+            <a:off x="3835908" y="2331720"/>
+            <a:ext cx="2025396" cy="411480"/>
+          </a:xfrm>
+          <a:prstGeom prst="rect">
+            <a:avLst/>
+          </a:prstGeom>
+          <a:noFill/>
+        </p:spPr>
+        <p:txBody>
+          <a:bodyPr wrap="square">
+            <a:spAutoFit/>
+          </a:bodyPr>
+          <a:lstStyle/>
+          <a:p>
+            <a:pPr algn="l"/>
+            <a:r>
+              <a:rPr sz="1100" b="0">
+                <a:solidFill>
+                  <a:srgbClr val="5A6A7A"/>
+                </a:solidFill>
+                <a:latin typeface="Calibri"/>
+              </a:rPr>
+              <a:t>Üniversite / danışman</a:t>
+            </a:r>
+          </a:p>
+        </p:txBody>
+      </p:sp>
+      <p:cxnSp>
+        <p:nvCxnSpPr>
+          <p:cNvPr id="20" name="Connector 19"/>
+          <p:cNvCxnSpPr/>
+          <p:nvPr/>
+        </p:nvCxnSpPr>
+        <p:spPr>
+          <a:xfrm>
+            <a:off x="5998464.0" y="2354580.0"/>
+            <a:ext cx="164592.0" cy="0.0"/>
+          </a:xfrm>
+          <a:prstGeom prst="line">
+            <a:avLst/>
+          </a:prstGeom>
+          <a:ln w="25400">
+            <a:solidFill>
+              <a:srgbClr val="1FA6A0"/>
+            </a:solidFill>
+          </a:ln>
+        </p:spPr>
+        <p:style>
+          <a:lnRef idx="2">
+            <a:schemeClr val="accent1"/>
+          </a:lnRef>
+          <a:fillRef idx="0">
+            <a:schemeClr val="accent1"/>
+          </a:fillRef>
+          <a:effectRef idx="1">
+            <a:schemeClr val="accent1"/>
+          </a:effectRef>
+          <a:fontRef idx="minor">
+            <a:schemeClr val="tx1"/>
+          </a:fontRef>
+        </p:style>
+      </p:cxnSp>
+      <p:sp>
+        <p:nvSpPr>
+          <p:cNvPr id="21" name="Rounded Rectangle 20"/>
+          <p:cNvSpPr/>
+          <p:nvPr/>
+        </p:nvSpPr>
+        <p:spPr>
+          <a:xfrm>
+            <a:off x="6163056" y="1828800"/>
+            <a:ext cx="2665476" cy="1051560"/>
+          </a:xfrm>
+          <a:prstGeom prst="roundRect">
+            <a:avLst>
+              <a:gd name="adj" fmla="val 12000"/>
+            </a:avLst>
+          </a:prstGeom>
+          <a:solidFill>
+            <a:srgbClr val="EEF5F8"/>
+          </a:solidFill>
+          <a:ln>
+            <a:noFill/>
+          </a:ln>
+        </p:spPr>
+        <p:style>
+          <a:lnRef idx="1">
+            <a:schemeClr val="accent1"/>
+          </a:lnRef>
+          <a:fillRef idx="3">
+            <a:schemeClr val="accent1"/>
+          </a:fillRef>
+          <a:effectRef idx="2">
+            <a:schemeClr val="accent1"/>
+          </a:effectRef>
+          <a:fontRef idx="minor">
+            <a:schemeClr val="lt1"/>
+          </a:fontRef>
+        </p:style>
+        <p:txBody>
+          <a:bodyPr rtlCol="0" anchor="ctr"/>
+          <a:lstStyle/>
+          <a:p>
+            <a:pPr algn="ctr"/>
+          </a:p>
+        </p:txBody>
+      </p:sp>
+      <p:sp>
+        <p:nvSpPr>
+          <p:cNvPr id="22" name="Oval 21"/>
+          <p:cNvSpPr/>
+          <p:nvPr/>
+        </p:nvSpPr>
+        <p:spPr>
+          <a:xfrm>
+            <a:off x="6291072" y="1993392"/>
+            <a:ext cx="292608" cy="292608"/>
+          </a:xfrm>
+          <a:prstGeom prst="ellipse">
+            <a:avLst/>
+          </a:prstGeom>
+          <a:solidFill>
+            <a:srgbClr val="1FA6A0"/>
+          </a:solidFill>
+          <a:ln>
+            <a:noFill/>
+          </a:ln>
+        </p:spPr>
+        <p:style>
+          <a:lnRef idx="1">
+            <a:schemeClr val="accent1"/>
+          </a:lnRef>
+          <a:fillRef idx="3">
+            <a:schemeClr val="accent1"/>
+          </a:fillRef>
+          <a:effectRef idx="2">
+            <a:schemeClr val="accent1"/>
+          </a:effectRef>
+          <a:fontRef idx="minor">
+            <a:schemeClr val="lt1"/>
+          </a:fontRef>
+        </p:style>
+        <p:txBody>
+          <a:bodyPr rtlCol="0" anchor="ctr"/>
+          <a:lstStyle/>
+          <a:p>
+            <a:pPr algn="ctr"/>
+          </a:p>
+        </p:txBody>
+      </p:sp>
+      <p:sp>
+        <p:nvSpPr>
+          <p:cNvPr id="23" name="TextBox 22"/>
+          <p:cNvSpPr txBox="1"/>
+          <p:nvPr/>
+        </p:nvSpPr>
+        <p:spPr>
+          <a:xfrm>
+            <a:off x="6291072" y="2011680"/>
+            <a:ext cx="292608" cy="274320"/>
+          </a:xfrm>
+          <a:prstGeom prst="rect">
+            <a:avLst/>
+          </a:prstGeom>
+          <a:noFill/>
+        </p:spPr>
+        <p:txBody>
+          <a:bodyPr wrap="square">
+            <a:spAutoFit/>
+          </a:bodyPr>
+          <a:lstStyle/>
+          <a:p>
+            <a:pPr algn="ctr"/>
+            <a:r>
+              <a:rPr sz="1200" b="1">
+                <a:solidFill>
+                  <a:srgbClr val="FFFFFF"/>
+                </a:solidFill>
+                <a:latin typeface="Calibri"/>
+              </a:rPr>
+              <a:t>3</a:t>
+            </a:r>
+          </a:p>
+        </p:txBody>
+      </p:sp>
+      <p:sp>
+        <p:nvSpPr>
+          <p:cNvPr id="24" name="TextBox 23"/>
+          <p:cNvSpPr txBox="1"/>
+          <p:nvPr/>
+        </p:nvSpPr>
+        <p:spPr>
+          <a:xfrm>
+            <a:off x="6665976" y="1993392"/>
+            <a:ext cx="2025396" cy="292608"/>
+          </a:xfrm>
+          <a:prstGeom prst="rect">
+            <a:avLst/>
+          </a:prstGeom>
+          <a:noFill/>
+        </p:spPr>
+        <p:txBody>
+          <a:bodyPr wrap="square">
+            <a:spAutoFit/>
+          </a:bodyPr>
+          <a:lstStyle/>
+          <a:p>
+            <a:pPr algn="l"/>
+            <a:r>
+              <a:rPr sz="1300" b="1">
+                <a:solidFill>
+                  <a:srgbClr val="0B1F33"/>
+                </a:solidFill>
+                <a:latin typeface="Calibri"/>
+              </a:rPr>
+              <a:t>Rozet</a:t>
+            </a:r>
+          </a:p>
+        </p:txBody>
+      </p:sp>
+      <p:sp>
+        <p:nvSpPr>
+          <p:cNvPr id="25" name="TextBox 24"/>
+          <p:cNvSpPr txBox="1"/>
+          <p:nvPr/>
+        </p:nvSpPr>
+        <p:spPr>
+          <a:xfrm>
+            <a:off x="6665976" y="2331720"/>
+            <a:ext cx="2025396" cy="411480"/>
+          </a:xfrm>
+          <a:prstGeom prst="rect">
+            <a:avLst/>
+          </a:prstGeom>
+          <a:noFill/>
+        </p:spPr>
+        <p:txBody>
+          <a:bodyPr wrap="square">
+            <a:spAutoFit/>
+          </a:bodyPr>
+          <a:lstStyle/>
+          <a:p>
+            <a:pPr algn="l"/>
+            <a:r>
+              <a:rPr sz="1100" b="0">
+                <a:solidFill>
+                  <a:srgbClr val="5A6A7A"/>
+                </a:solidFill>
+                <a:latin typeface="Calibri"/>
+              </a:rPr>
+              <a:t>Resmi hesap kimliği</a:t>
+            </a:r>
+          </a:p>
+        </p:txBody>
+      </p:sp>
+      <p:cxnSp>
+        <p:nvCxnSpPr>
+          <p:cNvPr id="26" name="Connector 25"/>
+          <p:cNvCxnSpPr/>
+          <p:nvPr/>
+        </p:nvCxnSpPr>
+        <p:spPr>
+          <a:xfrm>
+            <a:off x="8828532.0" y="2354580.0"/>
+            <a:ext cx="164592.0" cy="0.0"/>
+          </a:xfrm>
+          <a:prstGeom prst="line">
+            <a:avLst/>
+          </a:prstGeom>
+          <a:ln w="25400">
+            <a:solidFill>
+              <a:srgbClr val="1FA6A0"/>
+            </a:solidFill>
+          </a:ln>
+        </p:spPr>
+        <p:style>
+          <a:lnRef idx="2">
+            <a:schemeClr val="accent1"/>
+          </a:lnRef>
+          <a:fillRef idx="0">
+            <a:schemeClr val="accent1"/>
+          </a:fillRef>
+          <a:effectRef idx="1">
+            <a:schemeClr val="accent1"/>
+          </a:effectRef>
+          <a:fontRef idx="minor">
+            <a:schemeClr val="tx1"/>
+          </a:fontRef>
+        </p:style>
+      </p:cxnSp>
+      <p:sp>
+        <p:nvSpPr>
+          <p:cNvPr id="27" name="Rounded Rectangle 26"/>
+          <p:cNvSpPr/>
+          <p:nvPr/>
+        </p:nvSpPr>
+        <p:spPr>
+          <a:xfrm>
+            <a:off x="8993124" y="1828800"/>
+            <a:ext cx="2665476" cy="1051560"/>
+          </a:xfrm>
+          <a:prstGeom prst="roundRect">
+            <a:avLst>
+              <a:gd name="adj" fmla="val 12000"/>
+            </a:avLst>
+          </a:prstGeom>
+          <a:solidFill>
+            <a:srgbClr val="E4F0F4"/>
+          </a:solidFill>
+          <a:ln>
+            <a:noFill/>
+          </a:ln>
+        </p:spPr>
+        <p:style>
+          <a:lnRef idx="1">
+            <a:schemeClr val="accent1"/>
+          </a:lnRef>
+          <a:fillRef idx="3">
+            <a:schemeClr val="accent1"/>
+          </a:fillRef>
+          <a:effectRef idx="2">
+            <a:schemeClr val="accent1"/>
+          </a:effectRef>
+          <a:fontRef idx="minor">
+            <a:schemeClr val="lt1"/>
+          </a:fontRef>
+        </p:style>
+        <p:txBody>
+          <a:bodyPr rtlCol="0" anchor="ctr"/>
+          <a:lstStyle/>
+          <a:p>
+            <a:pPr algn="ctr"/>
+          </a:p>
+        </p:txBody>
+      </p:sp>
+      <p:sp>
+        <p:nvSpPr>
+          <p:cNvPr id="28" name="Oval 27"/>
+          <p:cNvSpPr/>
+          <p:nvPr/>
+        </p:nvSpPr>
+        <p:spPr>
+          <a:xfrm>
+            <a:off x="9121140" y="1993392"/>
+            <a:ext cx="292608" cy="292608"/>
+          </a:xfrm>
+          <a:prstGeom prst="ellipse">
+            <a:avLst/>
+          </a:prstGeom>
+          <a:solidFill>
+            <a:srgbClr val="1FA6A0"/>
+          </a:solidFill>
+          <a:ln>
+            <a:noFill/>
+          </a:ln>
+        </p:spPr>
+        <p:style>
+          <a:lnRef idx="1">
+            <a:schemeClr val="accent1"/>
+          </a:lnRef>
+          <a:fillRef idx="3">
+            <a:schemeClr val="accent1"/>
+          </a:fillRef>
+          <a:effectRef idx="2">
+            <a:schemeClr val="accent1"/>
+          </a:effectRef>
+          <a:fontRef idx="minor">
+            <a:schemeClr val="lt1"/>
+          </a:fontRef>
+        </p:style>
+        <p:txBody>
+          <a:bodyPr rtlCol="0" anchor="ctr"/>
+          <a:lstStyle/>
+          <a:p>
+            <a:pPr algn="ctr"/>
+          </a:p>
+        </p:txBody>
+      </p:sp>
+      <p:sp>
+        <p:nvSpPr>
+          <p:cNvPr id="29" name="TextBox 28"/>
+          <p:cNvSpPr txBox="1"/>
+          <p:nvPr/>
+        </p:nvSpPr>
+        <p:spPr>
+          <a:xfrm>
+            <a:off x="9121140" y="2011680"/>
+            <a:ext cx="292608" cy="274320"/>
+          </a:xfrm>
+          <a:prstGeom prst="rect">
+            <a:avLst/>
+          </a:prstGeom>
+          <a:noFill/>
+        </p:spPr>
+        <p:txBody>
+          <a:bodyPr wrap="square">
+            <a:spAutoFit/>
+          </a:bodyPr>
+          <a:lstStyle/>
+          <a:p>
+            <a:pPr algn="ctr"/>
+            <a:r>
+              <a:rPr sz="1200" b="1">
+                <a:solidFill>
+                  <a:srgbClr val="FFFFFF"/>
+                </a:solidFill>
+                <a:latin typeface="Calibri"/>
+              </a:rPr>
+              <a:t>4</a:t>
+            </a:r>
+          </a:p>
+        </p:txBody>
+      </p:sp>
+      <p:sp>
+        <p:nvSpPr>
+          <p:cNvPr id="30" name="TextBox 29"/>
+          <p:cNvSpPr txBox="1"/>
+          <p:nvPr/>
+        </p:nvSpPr>
+        <p:spPr>
+          <a:xfrm>
+            <a:off x="9496044" y="1993392"/>
+            <a:ext cx="2025396" cy="292608"/>
+          </a:xfrm>
+          <a:prstGeom prst="rect">
+            <a:avLst/>
+          </a:prstGeom>
+          <a:noFill/>
+        </p:spPr>
+        <p:txBody>
+          <a:bodyPr wrap="square">
+            <a:spAutoFit/>
+          </a:bodyPr>
+          <a:lstStyle/>
+          <a:p>
+            <a:pPr algn="l"/>
+            <a:r>
+              <a:rPr sz="1300" b="1">
+                <a:solidFill>
+                  <a:srgbClr val="0B1F33"/>
+                </a:solidFill>
+                <a:latin typeface="Calibri"/>
+              </a:rPr>
+              <a:t>Yayın</a:t>
+            </a:r>
+          </a:p>
+        </p:txBody>
+      </p:sp>
+      <p:sp>
+        <p:nvSpPr>
+          <p:cNvPr id="31" name="TextBox 30"/>
+          <p:cNvSpPr txBox="1"/>
+          <p:nvPr/>
+        </p:nvSpPr>
+        <p:spPr>
+          <a:xfrm>
+            <a:off x="9496044" y="2331720"/>
+            <a:ext cx="2025396" cy="411480"/>
+          </a:xfrm>
+          <a:prstGeom prst="rect">
+            <a:avLst/>
+          </a:prstGeom>
+          <a:noFill/>
+        </p:spPr>
+        <p:txBody>
+          <a:bodyPr wrap="square">
+            <a:spAutoFit/>
+          </a:bodyPr>
+          <a:lstStyle/>
+          <a:p>
+            <a:pPr algn="l"/>
+            <a:r>
+              <a:rPr sz="1100" b="0">
+                <a:solidFill>
+                  <a:srgbClr val="5A6A7A"/>
+                </a:solidFill>
+                <a:latin typeface="Calibri"/>
+              </a:rPr>
+              <a:t>İlk etkinlik ve duyuru</a:t>
+            </a:r>
+          </a:p>
+        </p:txBody>
+      </p:sp>
+      <p:sp>
+        <p:nvSpPr>
+          <p:cNvPr id="32" name="Rounded Rectangle 31"/>
+          <p:cNvSpPr/>
+          <p:nvPr/>
+        </p:nvSpPr>
+        <p:spPr>
+          <a:xfrm>
+            <a:off x="822960" y="3474720"/>
+            <a:ext cx="10561320" cy="1371600"/>
+          </a:xfrm>
+          <a:prstGeom prst="roundRect">
+            <a:avLst>
+              <a:gd name="adj" fmla="val 12000"/>
+            </a:avLst>
+          </a:prstGeom>
+          <a:solidFill>
+            <a:srgbClr val="EEF5F8"/>
+          </a:solidFill>
+          <a:ln w="12700">
+            <a:solidFill>
+              <a:srgbClr val="1FA6A0"/>
+            </a:solidFill>
+          </a:ln>
+        </p:spPr>
+        <p:style>
+          <a:lnRef idx="1">
+            <a:schemeClr val="accent1"/>
+          </a:lnRef>
+          <a:fillRef idx="3">
+            <a:schemeClr val="accent1"/>
+          </a:fillRef>
+          <a:effectRef idx="2">
+            <a:schemeClr val="accent1"/>
+          </a:effectRef>
+          <a:fontRef idx="minor">
+            <a:schemeClr val="lt1"/>
+          </a:fontRef>
+        </p:style>
+        <p:txBody>
+          <a:bodyPr rtlCol="0" anchor="ctr"/>
+          <a:lstStyle/>
+          <a:p>
+            <a:pPr algn="ctr"/>
+          </a:p>
+        </p:txBody>
+      </p:sp>
+      <p:sp>
+        <p:nvSpPr>
+          <p:cNvPr id="33" name="TextBox 32"/>
+          <p:cNvSpPr txBox="1"/>
+          <p:nvPr/>
+        </p:nvSpPr>
+        <p:spPr>
+          <a:xfrm>
+            <a:off x="1097280" y="3749039"/>
+            <a:ext cx="10012680" cy="347472"/>
+          </a:xfrm>
+          <a:prstGeom prst="rect">
+            <a:avLst/>
+          </a:prstGeom>
+          <a:noFill/>
+        </p:spPr>
+        <p:txBody>
+          <a:bodyPr wrap="square">
+            <a:spAutoFit/>
+          </a:bodyPr>
+          <a:lstStyle/>
+          <a:p>
+            <a:pPr algn="ctr"/>
+            <a:r>
+              <a:rPr sz="1800" b="1">
+                <a:solidFill>
+                  <a:srgbClr val="0B1F33"/>
+                </a:solidFill>
+                <a:latin typeface="Calibri"/>
+              </a:rPr>
+              <a:t>Doğrulanmış topluluk hesabı</a:t>
+            </a:r>
+          </a:p>
+        </p:txBody>
+      </p:sp>
+      <p:sp>
+        <p:nvSpPr>
+          <p:cNvPr id="34" name="TextBox 33"/>
+          <p:cNvSpPr txBox="1"/>
+          <p:nvPr/>
+        </p:nvSpPr>
+        <p:spPr>
+          <a:xfrm>
+            <a:off x="1097280" y="4160520"/>
+            <a:ext cx="10012680" cy="457200"/>
+          </a:xfrm>
+          <a:prstGeom prst="rect">
+            <a:avLst/>
+          </a:prstGeom>
+          <a:noFill/>
+        </p:spPr>
+        <p:txBody>
+          <a:bodyPr wrap="square">
+            <a:spAutoFit/>
+          </a:bodyPr>
+          <a:lstStyle/>
+          <a:p>
+            <a:pPr algn="ctr"/>
+            <a:r>
+              <a:rPr sz="1400" b="0">
+                <a:solidFill>
+                  <a:srgbClr val="5A6A7A"/>
+                </a:solidFill>
+                <a:latin typeface="Calibri"/>
+              </a:rPr>
+              <a:t>Logo zorunlu · Duyuru yetkisi · Etkinlik kartı · Guard / moderasyon</a:t>
+            </a:r>
+          </a:p>
+        </p:txBody>
+      </p:sp>
+      <p:sp>
+        <p:nvSpPr>
+          <p:cNvPr id="35" name="Rectangle 34"/>
+          <p:cNvSpPr/>
+          <p:nvPr/>
+        </p:nvSpPr>
+        <p:spPr>
+          <a:xfrm>
+            <a:off x="0" y="6473952"/>
+            <a:ext cx="12191695" cy="384048"/>
+          </a:xfrm>
+          <a:prstGeom prst="rect">
+            <a:avLst/>
+          </a:prstGeom>
+          <a:solidFill>
+            <a:srgbClr val="1FA6A0"/>
+          </a:solidFill>
+          <a:ln>
+            <a:noFill/>
+          </a:ln>
+        </p:spPr>
+        <p:style>
+          <a:lnRef idx="1">
+            <a:schemeClr val="accent1"/>
+          </a:lnRef>
+          <a:fillRef idx="3">
+            <a:schemeClr val="accent1"/>
+          </a:fillRef>
+          <a:effectRef idx="2">
+            <a:schemeClr val="accent1"/>
+          </a:effectRef>
+          <a:fontRef idx="minor">
+            <a:schemeClr val="lt1"/>
+          </a:fontRef>
+        </p:style>
+        <p:txBody>
+          <a:bodyPr rtlCol="0" anchor="ctr"/>
+          <a:lstStyle/>
+          <a:p>
+            <a:pPr algn="ctr"/>
+          </a:p>
+        </p:txBody>
+      </p:sp>
+      <p:sp>
+        <p:nvSpPr>
+          <p:cNvPr id="36" name="TextBox 35"/>
+          <p:cNvSpPr txBox="1"/>
+          <p:nvPr/>
+        </p:nvSpPr>
+        <p:spPr>
+          <a:xfrm>
+            <a:off x="365760" y="6547104"/>
+            <a:ext cx="3657600" cy="256032"/>
+          </a:xfrm>
+          <a:prstGeom prst="rect">
+            <a:avLst/>
+          </a:prstGeom>
+          <a:noFill/>
+        </p:spPr>
+        <p:txBody>
+          <a:bodyPr wrap="square">
+            <a:spAutoFit/>
+          </a:bodyPr>
+          <a:lstStyle/>
+          <a:p>
+            <a:pPr algn="l"/>
+            <a:r>
+              <a:rPr sz="1100" b="1">
+                <a:solidFill>
+                  <a:srgbClr val="FFFFFF"/>
+                </a:solidFill>
+                <a:latin typeface="Calibri"/>
+              </a:rPr>
+              <a:t>@kampusteyimapp</a:t>
+            </a:r>
+          </a:p>
+        </p:txBody>
+      </p:sp>
+      <p:sp>
+        <p:nvSpPr>
+          <p:cNvPr id="37" name="TextBox 36"/>
+          <p:cNvSpPr txBox="1"/>
+          <p:nvPr/>
+        </p:nvSpPr>
+        <p:spPr>
+          <a:xfrm>
+            <a:off x="10180015" y="6547104"/>
+            <a:ext cx="1645920" cy="256032"/>
+          </a:xfrm>
+          <a:prstGeom prst="rect">
+            <a:avLst/>
+          </a:prstGeom>
+          <a:noFill/>
+        </p:spPr>
+        <p:txBody>
+          <a:bodyPr wrap="square">
+            <a:spAutoFit/>
+          </a:bodyPr>
+          <a:lstStyle/>
+          <a:p>
+            <a:pPr algn="r"/>
+            <a:r>
+              <a:rPr sz="1100" b="0">
+                <a:solidFill>
+                  <a:srgbClr val="FFFFFF"/>
+                </a:solidFill>
+                <a:latin typeface="Calibri"/>
+              </a:rPr>
+              <a:t>7 / 9</a:t>
+            </a:r>
+          </a:p>
+        </p:txBody>
+      </p:sp>
+    </p:spTree>
+  </p:cSld>
+  <p:clrMapOvr>
+    <a:masterClrMapping/>
+  </p:clrMapOvr>
+</p:sld>
+</file>
+
+<file path=ppt/slides/slide9.xml><?xml version="1.0" encoding="utf-8"?>
+<p:sld xmlns:a="http://schemas.openxmlformats.org/drawingml/2006/main" xmlns:p="http://schemas.openxmlformats.org/presentationml/2006/main" xmlns:r="http://schemas.openxmlformats.org/officeDocument/2006/relationships">
+  <p:cSld>
+    <p:spTree>
+      <p:nvGrpSpPr>
+        <p:cNvPr id="1" name=""/>
+        <p:cNvGrpSpPr/>
+        <p:nvPr/>
+      </p:nvGrpSpPr>
+      <p:grpSpPr/>
+      <p:sp>
+        <p:nvSpPr>
+          <p:cNvPr id="2" name="Rectangle 1"/>
+          <p:cNvSpPr/>
+          <p:nvPr/>
+        </p:nvSpPr>
+        <p:spPr>
+          <a:xfrm>
+            <a:off x="0" y="0"/>
+            <a:ext cx="12191695" cy="502920"/>
+          </a:xfrm>
+          <a:prstGeom prst="rect">
+            <a:avLst/>
           </a:prstGeom>
           <a:solidFill>
             <a:srgbClr val="0B1F33"/>
@@ -9987,123 +11280,182 @@
           </a:p>
         </p:txBody>
       </p:sp>
-      <p:sp>
-        <p:nvSpPr>
-          <p:cNvPr id="10" name="TextBox 9"/>
-          <p:cNvSpPr txBox="1"/>
-          <p:nvPr/>
-        </p:nvSpPr>
-        <p:spPr>
-          <a:xfrm>
-            <a:off x="1188720" y="2103120"/>
-            <a:ext cx="9829800" cy="502920"/>
-          </a:xfrm>
-          <a:prstGeom prst="rect">
-            <a:avLst/>
-          </a:prstGeom>
-          <a:noFill/>
-        </p:spPr>
-        <p:txBody>
-          <a:bodyPr wrap="square">
-            <a:spAutoFit/>
-          </a:bodyPr>
-          <a:lstStyle/>
-          <a:p>
-            <a:pPr algn="ctr"/>
-            <a:r>
-              <a:rPr sz="2400" b="1">
-                <a:solidFill>
-                  <a:srgbClr val="2EC4B6"/>
-                </a:solidFill>
-                <a:latin typeface="Calibri"/>
-              </a:rPr>
-              <a:t>Etkinliğini duyur. Üyeni büyüt. Resmi kimliğini güçlendir.</a:t>
-            </a:r>
-          </a:p>
-        </p:txBody>
-      </p:sp>
-      <p:sp>
-        <p:nvSpPr>
-          <p:cNvPr id="11" name="TextBox 10"/>
-          <p:cNvSpPr txBox="1"/>
-          <p:nvPr/>
-        </p:nvSpPr>
-        <p:spPr>
-          <a:xfrm>
-            <a:off x="1554480" y="2816352"/>
-            <a:ext cx="9098280" cy="594360"/>
-          </a:xfrm>
-          <a:prstGeom prst="rect">
-            <a:avLst/>
-          </a:prstGeom>
-          <a:noFill/>
-        </p:spPr>
-        <p:txBody>
-          <a:bodyPr wrap="square">
-            <a:spAutoFit/>
-          </a:bodyPr>
-          <a:lstStyle/>
-          <a:p>
-            <a:pPr algn="ctr"/>
-            <a:r>
-              <a:rPr sz="1600" b="0">
+      <p:pic>
+        <p:nvPicPr>
+          <p:cNvPr id="3" name="Picture 2" descr="logo_kampus_header.png"/>
+          <p:cNvPicPr>
+            <a:picLocks noChangeAspect="1"/>
+          </p:cNvPicPr>
+          <p:nvPr/>
+        </p:nvPicPr>
+        <p:blipFill>
+          <a:blip r:embed="rId2"/>
+          <a:stretch>
+            <a:fillRect/>
+          </a:stretch>
+        </p:blipFill>
+        <p:spPr>
+          <a:xfrm>
+            <a:off x="320040" y="91440"/>
+            <a:ext cx="320040" cy="320040"/>
+          </a:xfrm>
+          <a:prstGeom prst="rect">
+            <a:avLst/>
+          </a:prstGeom>
+        </p:spPr>
+      </p:pic>
+      <p:sp>
+        <p:nvSpPr>
+          <p:cNvPr id="4" name="TextBox 3"/>
+          <p:cNvSpPr txBox="1"/>
+          <p:nvPr/>
+        </p:nvSpPr>
+        <p:spPr>
+          <a:xfrm>
+            <a:off x="731520" y="109728"/>
+            <a:ext cx="3657600" cy="320040"/>
+          </a:xfrm>
+          <a:prstGeom prst="rect">
+            <a:avLst/>
+          </a:prstGeom>
+          <a:noFill/>
+        </p:spPr>
+        <p:txBody>
+          <a:bodyPr wrap="square">
+            <a:spAutoFit/>
+          </a:bodyPr>
+          <a:lstStyle/>
+          <a:p>
+            <a:pPr algn="l"/>
+            <a:r>
+              <a:rPr sz="1400" b="1">
                 <a:solidFill>
                   <a:srgbClr val="FFFFFF"/>
                 </a:solidFill>
                 <a:latin typeface="Calibri"/>
               </a:rPr>
-              <a:t>KampüsteyimAPP ile topluluğunuzu doğrulanmış, erişilebilir ve ölçülebilir bir dijital merkeze taşıyın.</a:t>
-            </a:r>
-          </a:p>
-        </p:txBody>
-      </p:sp>
-      <p:sp>
-        <p:nvSpPr>
-          <p:cNvPr id="12" name="TextBox 11"/>
-          <p:cNvSpPr txBox="1"/>
-          <p:nvPr/>
-        </p:nvSpPr>
-        <p:spPr>
-          <a:xfrm>
-            <a:off x="914400" y="4572000"/>
-            <a:ext cx="10332720" cy="411480"/>
-          </a:xfrm>
-          <a:prstGeom prst="rect">
-            <a:avLst/>
-          </a:prstGeom>
-          <a:noFill/>
-        </p:spPr>
-        <p:txBody>
-          <a:bodyPr wrap="square">
-            <a:spAutoFit/>
-          </a:bodyPr>
-          <a:lstStyle/>
-          <a:p>
-            <a:pPr algn="ctr"/>
-            <a:r>
-              <a:rPr sz="1800" b="1">
+              <a:t>KampüsteyimAPP</a:t>
+            </a:r>
+          </a:p>
+        </p:txBody>
+      </p:sp>
+      <p:sp>
+        <p:nvSpPr>
+          <p:cNvPr id="5" name="TextBox 4"/>
+          <p:cNvSpPr txBox="1"/>
+          <p:nvPr/>
+        </p:nvSpPr>
+        <p:spPr>
+          <a:xfrm>
+            <a:off x="9265615" y="128016"/>
+            <a:ext cx="2560320" cy="274320"/>
+          </a:xfrm>
+          <a:prstGeom prst="rect">
+            <a:avLst/>
+          </a:prstGeom>
+          <a:noFill/>
+        </p:spPr>
+        <p:txBody>
+          <a:bodyPr wrap="square">
+            <a:spAutoFit/>
+          </a:bodyPr>
+          <a:lstStyle/>
+          <a:p>
+            <a:pPr algn="r"/>
+            <a:r>
+              <a:rPr sz="1100" b="0">
+                <a:solidFill>
+                  <a:srgbClr val="B8C8D4"/>
+                </a:solidFill>
+                <a:latin typeface="Calibri"/>
+              </a:rPr>
+              <a:t>Üniversite Toplulukları</a:t>
+            </a:r>
+          </a:p>
+        </p:txBody>
+      </p:sp>
+      <p:sp>
+        <p:nvSpPr>
+          <p:cNvPr id="6" name="TextBox 5"/>
+          <p:cNvSpPr txBox="1"/>
+          <p:nvPr/>
+        </p:nvSpPr>
+        <p:spPr>
+          <a:xfrm>
+            <a:off x="502920" y="658368"/>
+            <a:ext cx="3657600" cy="256032"/>
+          </a:xfrm>
+          <a:prstGeom prst="rect">
+            <a:avLst/>
+          </a:prstGeom>
+          <a:noFill/>
+        </p:spPr>
+        <p:txBody>
+          <a:bodyPr wrap="square">
+            <a:spAutoFit/>
+          </a:bodyPr>
+          <a:lstStyle/>
+          <a:p>
+            <a:pPr algn="l"/>
+            <a:r>
+              <a:rPr sz="1100" b="1">
                 <a:solidFill>
                   <a:srgbClr val="1FA6A0"/>
                 </a:solidFill>
                 <a:latin typeface="Calibri"/>
               </a:rPr>
-              <a:t>@kampusteyimapp  ·  kampusteyim.app</a:t>
-            </a:r>
-          </a:p>
-        </p:txBody>
-      </p:sp>
-      <p:sp>
-        <p:nvSpPr>
-          <p:cNvPr id="13" name="Rectangle 12"/>
+              <a:t>STAND QR'LARI</a:t>
+            </a:r>
+          </a:p>
+        </p:txBody>
+      </p:sp>
+      <p:sp>
+        <p:nvSpPr>
+          <p:cNvPr id="7" name="TextBox 6"/>
+          <p:cNvSpPr txBox="1"/>
+          <p:nvPr/>
+        </p:nvSpPr>
+        <p:spPr>
+          <a:xfrm>
+            <a:off x="502920" y="896112"/>
+            <a:ext cx="10515600" cy="411480"/>
+          </a:xfrm>
+          <a:prstGeom prst="rect">
+            <a:avLst/>
+          </a:prstGeom>
+          <a:noFill/>
+        </p:spPr>
+        <p:txBody>
+          <a:bodyPr wrap="square">
+            <a:spAutoFit/>
+          </a:bodyPr>
+          <a:lstStyle/>
+          <a:p>
+            <a:pPr algn="l"/>
+            <a:r>
+              <a:rPr sz="2800" b="1">
+                <a:solidFill>
+                  <a:srgbClr val="0B1F33"/>
+                </a:solidFill>
+                <a:latin typeface="Calibri"/>
+              </a:rPr>
+              <a:t>Okut, indir ve takip et</a:t>
+            </a:r>
+          </a:p>
+        </p:txBody>
+      </p:sp>
+      <p:sp>
+        <p:nvSpPr>
+          <p:cNvPr id="8" name="Rounded Rectangle 7"/>
           <p:cNvSpPr/>
           <p:nvPr/>
         </p:nvSpPr>
         <p:spPr>
           <a:xfrm>
-            <a:off x="0" y="6473952"/>
-            <a:ext cx="12191695" cy="384048"/>
-          </a:xfrm>
-          <a:prstGeom prst="rect">
+            <a:off x="502920" y="1325880"/>
+            <a:ext cx="1005840" cy="64008"/>
+          </a:xfrm>
+          <a:prstGeom prst="roundRect">
             <a:avLst/>
           </a:prstGeom>
           <a:solidFill>
@@ -10137,7 +11489,371 @@
       </p:sp>
       <p:sp>
         <p:nvSpPr>
-          <p:cNvPr id="14" name="TextBox 13"/>
+          <p:cNvPr id="9" name="Rounded Rectangle 8"/>
+          <p:cNvSpPr/>
+          <p:nvPr/>
+        </p:nvSpPr>
+        <p:spPr>
+          <a:xfrm>
+            <a:off x="1856232" y="1490472"/>
+            <a:ext cx="2642616" cy="3410712"/>
+          </a:xfrm>
+          <a:prstGeom prst="roundRect">
+            <a:avLst>
+              <a:gd name="adj" fmla="val 12000"/>
+            </a:avLst>
+          </a:prstGeom>
+          <a:solidFill>
+            <a:srgbClr val="FFFFFF"/>
+          </a:solidFill>
+          <a:ln w="12700">
+            <a:solidFill>
+              <a:srgbClr val="C9D8E2"/>
+            </a:solidFill>
+          </a:ln>
+        </p:spPr>
+        <p:style>
+          <a:lnRef idx="1">
+            <a:schemeClr val="accent1"/>
+          </a:lnRef>
+          <a:fillRef idx="3">
+            <a:schemeClr val="accent1"/>
+          </a:fillRef>
+          <a:effectRef idx="2">
+            <a:schemeClr val="accent1"/>
+          </a:effectRef>
+          <a:fontRef idx="minor">
+            <a:schemeClr val="lt1"/>
+          </a:fontRef>
+        </p:style>
+        <p:txBody>
+          <a:bodyPr rtlCol="0" anchor="ctr"/>
+          <a:lstStyle/>
+          <a:p>
+            <a:pPr algn="ctr"/>
+          </a:p>
+        </p:txBody>
+      </p:sp>
+      <p:pic>
+        <p:nvPicPr>
+          <p:cNvPr id="10" name="Picture 9" descr="qr_kampusteyim_indir.png">
+            <a:hlinkClick r:id="rId4"/>
+          </p:cNvPr>
+          <p:cNvPicPr>
+            <a:picLocks noChangeAspect="1"/>
+          </p:cNvPicPr>
+          <p:nvPr/>
+        </p:nvPicPr>
+        <p:blipFill>
+          <a:blip r:embed="rId3"/>
+          <a:stretch>
+            <a:fillRect/>
+          </a:stretch>
+        </p:blipFill>
+        <p:spPr>
+          <a:xfrm>
+            <a:off x="1965960" y="1600200"/>
+            <a:ext cx="2423160" cy="2423160"/>
+          </a:xfrm>
+          <a:prstGeom prst="rect">
+            <a:avLst/>
+          </a:prstGeom>
+        </p:spPr>
+      </p:pic>
+      <p:sp>
+        <p:nvSpPr>
+          <p:cNvPr id="11" name="TextBox 10"/>
+          <p:cNvSpPr txBox="1"/>
+          <p:nvPr/>
+        </p:nvSpPr>
+        <p:spPr>
+          <a:xfrm>
+            <a:off x="1920240" y="4133088"/>
+            <a:ext cx="2514600" cy="274320"/>
+          </a:xfrm>
+          <a:prstGeom prst="rect">
+            <a:avLst/>
+          </a:prstGeom>
+          <a:noFill/>
+        </p:spPr>
+        <p:txBody>
+          <a:bodyPr wrap="square">
+            <a:spAutoFit/>
+          </a:bodyPr>
+          <a:lstStyle/>
+          <a:p>
+            <a:pPr algn="ctr"/>
+            <a:r>
+              <a:rPr sz="1400" b="1">
+                <a:solidFill>
+                  <a:srgbClr val="0B1F33"/>
+                </a:solidFill>
+                <a:latin typeface="Calibri"/>
+              </a:rPr>
+              <a:t>KampüsteyimAPP’i aç</a:t>
+            </a:r>
+          </a:p>
+        </p:txBody>
+      </p:sp>
+      <p:sp>
+        <p:nvSpPr>
+          <p:cNvPr id="12" name="TextBox 11"/>
+          <p:cNvSpPr txBox="1"/>
+          <p:nvPr/>
+        </p:nvSpPr>
+        <p:spPr>
+          <a:xfrm>
+            <a:off x="1920240" y="4416552"/>
+            <a:ext cx="2514600" cy="347472"/>
+          </a:xfrm>
+          <a:prstGeom prst="rect">
+            <a:avLst/>
+          </a:prstGeom>
+          <a:noFill/>
+        </p:spPr>
+        <p:txBody>
+          <a:bodyPr wrap="square">
+            <a:spAutoFit/>
+          </a:bodyPr>
+          <a:lstStyle/>
+          <a:p>
+            <a:pPr algn="ctr"/>
+            <a:r>
+              <a:rPr sz="1000" b="0">
+                <a:solidFill>
+                  <a:srgbClr val="5A6A7A"/>
+                </a:solidFill>
+                <a:latin typeface="Calibri"/>
+              </a:rPr>
+              <a:t>iOS / Android akıllı yönlendirme</a:t>
+            </a:r>
+          </a:p>
+        </p:txBody>
+      </p:sp>
+      <p:sp>
+        <p:nvSpPr>
+          <p:cNvPr id="13" name="Rounded Rectangle 12"/>
+          <p:cNvSpPr/>
+          <p:nvPr/>
+        </p:nvSpPr>
+        <p:spPr>
+          <a:xfrm>
+            <a:off x="7662672" y="1490472"/>
+            <a:ext cx="2642616" cy="3410712"/>
+          </a:xfrm>
+          <a:prstGeom prst="roundRect">
+            <a:avLst>
+              <a:gd name="adj" fmla="val 12000"/>
+            </a:avLst>
+          </a:prstGeom>
+          <a:solidFill>
+            <a:srgbClr val="FFFFFF"/>
+          </a:solidFill>
+          <a:ln w="12700">
+            <a:solidFill>
+              <a:srgbClr val="C9D8E2"/>
+            </a:solidFill>
+          </a:ln>
+        </p:spPr>
+        <p:style>
+          <a:lnRef idx="1">
+            <a:schemeClr val="accent1"/>
+          </a:lnRef>
+          <a:fillRef idx="3">
+            <a:schemeClr val="accent1"/>
+          </a:fillRef>
+          <a:effectRef idx="2">
+            <a:schemeClr val="accent1"/>
+          </a:effectRef>
+          <a:fontRef idx="minor">
+            <a:schemeClr val="lt1"/>
+          </a:fontRef>
+        </p:style>
+        <p:txBody>
+          <a:bodyPr rtlCol="0" anchor="ctr"/>
+          <a:lstStyle/>
+          <a:p>
+            <a:pPr algn="ctr"/>
+          </a:p>
+        </p:txBody>
+      </p:sp>
+      <p:pic>
+        <p:nvPicPr>
+          <p:cNvPr id="14" name="Picture 13" descr="qr_kampusteyim_instagram.png">
+            <a:hlinkClick r:id="rId6"/>
+          </p:cNvPr>
+          <p:cNvPicPr>
+            <a:picLocks noChangeAspect="1"/>
+          </p:cNvPicPr>
+          <p:nvPr/>
+        </p:nvPicPr>
+        <p:blipFill>
+          <a:blip r:embed="rId5"/>
+          <a:stretch>
+            <a:fillRect/>
+          </a:stretch>
+        </p:blipFill>
+        <p:spPr>
+          <a:xfrm>
+            <a:off x="7772400" y="1600200"/>
+            <a:ext cx="2423160" cy="2423160"/>
+          </a:xfrm>
+          <a:prstGeom prst="rect">
+            <a:avLst/>
+          </a:prstGeom>
+        </p:spPr>
+      </p:pic>
+      <p:sp>
+        <p:nvSpPr>
+          <p:cNvPr id="15" name="TextBox 14"/>
+          <p:cNvSpPr txBox="1"/>
+          <p:nvPr/>
+        </p:nvSpPr>
+        <p:spPr>
+          <a:xfrm>
+            <a:off x="7726680" y="4133088"/>
+            <a:ext cx="2514600" cy="274320"/>
+          </a:xfrm>
+          <a:prstGeom prst="rect">
+            <a:avLst/>
+          </a:prstGeom>
+          <a:noFill/>
+        </p:spPr>
+        <p:txBody>
+          <a:bodyPr wrap="square">
+            <a:spAutoFit/>
+          </a:bodyPr>
+          <a:lstStyle/>
+          <a:p>
+            <a:pPr algn="ctr"/>
+            <a:r>
+              <a:rPr sz="1400" b="1">
+                <a:solidFill>
+                  <a:srgbClr val="0B1F33"/>
+                </a:solidFill>
+                <a:latin typeface="Calibri"/>
+              </a:rPr>
+              <a:t>Hesabımızı takip et</a:t>
+            </a:r>
+          </a:p>
+        </p:txBody>
+      </p:sp>
+      <p:sp>
+        <p:nvSpPr>
+          <p:cNvPr id="16" name="TextBox 15"/>
+          <p:cNvSpPr txBox="1"/>
+          <p:nvPr/>
+        </p:nvSpPr>
+        <p:spPr>
+          <a:xfrm>
+            <a:off x="7726680" y="4416552"/>
+            <a:ext cx="2514600" cy="347472"/>
+          </a:xfrm>
+          <a:prstGeom prst="rect">
+            <a:avLst/>
+          </a:prstGeom>
+          <a:noFill/>
+        </p:spPr>
+        <p:txBody>
+          <a:bodyPr wrap="square">
+            <a:spAutoFit/>
+          </a:bodyPr>
+          <a:lstStyle/>
+          <a:p>
+            <a:pPr algn="ctr"/>
+            <a:r>
+              <a:rPr sz="1000" b="0">
+                <a:solidFill>
+                  <a:srgbClr val="5A6A7A"/>
+                </a:solidFill>
+                <a:latin typeface="Calibri"/>
+              </a:rPr>
+              <a:t>@kampusteyimapp</a:t>
+            </a:r>
+          </a:p>
+        </p:txBody>
+      </p:sp>
+      <p:sp>
+        <p:nvSpPr>
+          <p:cNvPr id="17" name="TextBox 16"/>
+          <p:cNvSpPr txBox="1"/>
+          <p:nvPr/>
+        </p:nvSpPr>
+        <p:spPr>
+          <a:xfrm>
+            <a:off x="1005840" y="5257800"/>
+            <a:ext cx="10149840" cy="438912"/>
+          </a:xfrm>
+          <a:prstGeom prst="rect">
+            <a:avLst/>
+          </a:prstGeom>
+          <a:noFill/>
+        </p:spPr>
+        <p:txBody>
+          <a:bodyPr wrap="square">
+            <a:spAutoFit/>
+          </a:bodyPr>
+          <a:lstStyle/>
+          <a:p>
+            <a:pPr algn="ctr"/>
+            <a:r>
+              <a:rPr sz="1700" b="1">
+                <a:solidFill>
+                  <a:srgbClr val="1FA6A0"/>
+                </a:solidFill>
+                <a:latin typeface="Calibri"/>
+              </a:rPr>
+              <a:t>Standda göster · Çıktı al · Öğrenciyi tek adımda yönlendir</a:t>
+            </a:r>
+          </a:p>
+        </p:txBody>
+      </p:sp>
+      <p:sp>
+        <p:nvSpPr>
+          <p:cNvPr id="18" name="Rectangle 17"/>
+          <p:cNvSpPr/>
+          <p:nvPr/>
+        </p:nvSpPr>
+        <p:spPr>
+          <a:xfrm>
+            <a:off x="0" y="6473952"/>
+            <a:ext cx="12191695" cy="384048"/>
+          </a:xfrm>
+          <a:prstGeom prst="rect">
+            <a:avLst/>
+          </a:prstGeom>
+          <a:solidFill>
+            <a:srgbClr val="1FA6A0"/>
+          </a:solidFill>
+          <a:ln>
+            <a:noFill/>
+          </a:ln>
+        </p:spPr>
+        <p:style>
+          <a:lnRef idx="1">
+            <a:schemeClr val="accent1"/>
+          </a:lnRef>
+          <a:fillRef idx="3">
+            <a:schemeClr val="accent1"/>
+          </a:fillRef>
+          <a:effectRef idx="2">
+            <a:schemeClr val="accent1"/>
+          </a:effectRef>
+          <a:fontRef idx="minor">
+            <a:schemeClr val="lt1"/>
+          </a:fontRef>
+        </p:style>
+        <p:txBody>
+          <a:bodyPr rtlCol="0" anchor="ctr"/>
+          <a:lstStyle/>
+          <a:p>
+            <a:pPr algn="ctr"/>
+          </a:p>
+        </p:txBody>
+      </p:sp>
+      <p:sp>
+        <p:nvSpPr>
+          <p:cNvPr id="19" name="TextBox 18"/>
           <p:cNvSpPr txBox="1"/>
           <p:nvPr/>
         </p:nvSpPr>
@@ -10172,7 +11888,7 @@
       </p:sp>
       <p:sp>
         <p:nvSpPr>
-          <p:cNvPr id="15" name="TextBox 14"/>
+          <p:cNvPr id="20" name="TextBox 19"/>
           <p:cNvSpPr txBox="1"/>
           <p:nvPr/>
         </p:nvSpPr>
@@ -10200,7 +11916,7 @@
                 </a:solidFill>
                 <a:latin typeface="Calibri"/>
               </a:rPr>
-              <a:t>7 / 7</a:t>
+              <a:t>8 / 9</a:t>
             </a:r>
           </a:p>
         </p:txBody>
